--- a/1차 프로젝트/SynchroBots - 1차 프로젝트_패키지 구조 설계_V1.1.pptx
+++ b/1차 프로젝트/SynchroBots - 1차 프로젝트_패키지 구조 설계_V1.1.pptx
@@ -201,7 +201,7 @@
           <a:p>
             <a:fld id="{62C123F7-F682-4AF0-84BD-B45DDFEA97D9}" type="datetimeFigureOut">
               <a:rPr lang="ko-KR" altLang="en-US" smtClean="0"/>
-              <a:t>2025-10-26</a:t>
+              <a:t>2025-11-11</a:t>
             </a:fld>
             <a:endParaRPr lang="ko-KR" altLang="en-US"/>
           </a:p>
@@ -891,7 +891,7 @@
           <a:p>
             <a:fld id="{C4747A5C-A443-4D44-B572-BB6D2137D467}" type="datetimeFigureOut">
               <a:rPr lang="ko-KR" altLang="en-US" smtClean="0"/>
-              <a:t>2025-10-26</a:t>
+              <a:t>2025-11-11</a:t>
             </a:fld>
             <a:endParaRPr lang="ko-KR" altLang="en-US"/>
           </a:p>
@@ -1089,7 +1089,7 @@
           <a:p>
             <a:fld id="{C4747A5C-A443-4D44-B572-BB6D2137D467}" type="datetimeFigureOut">
               <a:rPr lang="ko-KR" altLang="en-US" smtClean="0"/>
-              <a:t>2025-10-26</a:t>
+              <a:t>2025-11-11</a:t>
             </a:fld>
             <a:endParaRPr lang="ko-KR" altLang="en-US"/>
           </a:p>
@@ -1297,7 +1297,7 @@
           <a:p>
             <a:fld id="{C4747A5C-A443-4D44-B572-BB6D2137D467}" type="datetimeFigureOut">
               <a:rPr lang="ko-KR" altLang="en-US" smtClean="0"/>
-              <a:t>2025-10-26</a:t>
+              <a:t>2025-11-11</a:t>
             </a:fld>
             <a:endParaRPr lang="ko-KR" altLang="en-US"/>
           </a:p>
@@ -1495,7 +1495,7 @@
           <a:p>
             <a:fld id="{C4747A5C-A443-4D44-B572-BB6D2137D467}" type="datetimeFigureOut">
               <a:rPr lang="ko-KR" altLang="en-US" smtClean="0"/>
-              <a:t>2025-10-26</a:t>
+              <a:t>2025-11-11</a:t>
             </a:fld>
             <a:endParaRPr lang="ko-KR" altLang="en-US"/>
           </a:p>
@@ -1770,7 +1770,7 @@
           <a:p>
             <a:fld id="{C4747A5C-A443-4D44-B572-BB6D2137D467}" type="datetimeFigureOut">
               <a:rPr lang="ko-KR" altLang="en-US" smtClean="0"/>
-              <a:t>2025-10-26</a:t>
+              <a:t>2025-11-11</a:t>
             </a:fld>
             <a:endParaRPr lang="ko-KR" altLang="en-US"/>
           </a:p>
@@ -2035,7 +2035,7 @@
           <a:p>
             <a:fld id="{C4747A5C-A443-4D44-B572-BB6D2137D467}" type="datetimeFigureOut">
               <a:rPr lang="ko-KR" altLang="en-US" smtClean="0"/>
-              <a:t>2025-10-26</a:t>
+              <a:t>2025-11-11</a:t>
             </a:fld>
             <a:endParaRPr lang="ko-KR" altLang="en-US"/>
           </a:p>
@@ -2447,7 +2447,7 @@
           <a:p>
             <a:fld id="{C4747A5C-A443-4D44-B572-BB6D2137D467}" type="datetimeFigureOut">
               <a:rPr lang="ko-KR" altLang="en-US" smtClean="0"/>
-              <a:t>2025-10-26</a:t>
+              <a:t>2025-11-11</a:t>
             </a:fld>
             <a:endParaRPr lang="ko-KR" altLang="en-US"/>
           </a:p>
@@ -2588,7 +2588,7 @@
           <a:p>
             <a:fld id="{C4747A5C-A443-4D44-B572-BB6D2137D467}" type="datetimeFigureOut">
               <a:rPr lang="ko-KR" altLang="en-US" smtClean="0"/>
-              <a:t>2025-10-26</a:t>
+              <a:t>2025-11-11</a:t>
             </a:fld>
             <a:endParaRPr lang="ko-KR" altLang="en-US"/>
           </a:p>
@@ -2701,7 +2701,7 @@
           <a:p>
             <a:fld id="{C4747A5C-A443-4D44-B572-BB6D2137D467}" type="datetimeFigureOut">
               <a:rPr lang="ko-KR" altLang="en-US" smtClean="0"/>
-              <a:t>2025-10-26</a:t>
+              <a:t>2025-11-11</a:t>
             </a:fld>
             <a:endParaRPr lang="ko-KR" altLang="en-US"/>
           </a:p>
@@ -3012,7 +3012,7 @@
           <a:p>
             <a:fld id="{C4747A5C-A443-4D44-B572-BB6D2137D467}" type="datetimeFigureOut">
               <a:rPr lang="ko-KR" altLang="en-US" smtClean="0"/>
-              <a:t>2025-10-26</a:t>
+              <a:t>2025-11-11</a:t>
             </a:fld>
             <a:endParaRPr lang="ko-KR" altLang="en-US"/>
           </a:p>
@@ -3300,7 +3300,7 @@
           <a:p>
             <a:fld id="{C4747A5C-A443-4D44-B572-BB6D2137D467}" type="datetimeFigureOut">
               <a:rPr lang="ko-KR" altLang="en-US" smtClean="0"/>
-              <a:t>2025-10-26</a:t>
+              <a:t>2025-11-11</a:t>
             </a:fld>
             <a:endParaRPr lang="ko-KR" altLang="en-US"/>
           </a:p>
@@ -3541,7 +3541,7 @@
           <a:p>
             <a:fld id="{C4747A5C-A443-4D44-B572-BB6D2137D467}" type="datetimeFigureOut">
               <a:rPr lang="ko-KR" altLang="en-US" smtClean="0"/>
-              <a:t>2025-10-26</a:t>
+              <a:t>2025-11-11</a:t>
             </a:fld>
             <a:endParaRPr lang="ko-KR" altLang="en-US"/>
           </a:p>
@@ -4128,494 +4128,6 @@
       </p:sp>
       <p:sp>
         <p:nvSpPr>
-          <p:cNvPr id="3" name="사각형: 둥근 모서리 2">
-            <a:extLst>
-              <a:ext uri="{FF2B5EF4-FFF2-40B4-BE49-F238E27FC236}">
-                <a16:creationId xmlns:a16="http://schemas.microsoft.com/office/drawing/2014/main" id="{E678C480-87C6-F782-A58C-2745CF571189}"/>
-              </a:ext>
-            </a:extLst>
-          </p:cNvPr>
-          <p:cNvSpPr/>
-          <p:nvPr/>
-        </p:nvSpPr>
-        <p:spPr>
-          <a:xfrm>
-            <a:off x="401761" y="3052939"/>
-            <a:ext cx="2596055" cy="752118"/>
-          </a:xfrm>
-          <a:prstGeom prst="roundRect">
-            <a:avLst/>
-          </a:prstGeom>
-          <a:noFill/>
-          <a:ln w="38100">
-            <a:solidFill>
-              <a:srgbClr val="FFC000"/>
-            </a:solidFill>
-          </a:ln>
-        </p:spPr>
-        <p:style>
-          <a:lnRef idx="2">
-            <a:schemeClr val="accent1">
-              <a:shade val="15000"/>
-            </a:schemeClr>
-          </a:lnRef>
-          <a:fillRef idx="1">
-            <a:schemeClr val="accent1"/>
-          </a:fillRef>
-          <a:effectRef idx="0">
-            <a:schemeClr val="accent1"/>
-          </a:effectRef>
-          <a:fontRef idx="minor">
-            <a:schemeClr val="lt1"/>
-          </a:fontRef>
-        </p:style>
-        <p:txBody>
-          <a:bodyPr rtlCol="0" anchor="ctr"/>
-          <a:lstStyle/>
-          <a:p>
-            <a:pPr algn="ctr"/>
-            <a:r>
-              <a:rPr lang="en-US" altLang="ko-KR" dirty="0">
-                <a:solidFill>
-                  <a:schemeClr val="tx1"/>
-                </a:solidFill>
-              </a:rPr>
-              <a:t>Raspberry Pi 4G – Pi2</a:t>
-            </a:r>
-            <a:endParaRPr lang="ko-KR" altLang="en-US" dirty="0">
-              <a:solidFill>
-                <a:schemeClr val="tx1"/>
-              </a:solidFill>
-            </a:endParaRPr>
-          </a:p>
-        </p:txBody>
-      </p:sp>
-      <p:sp>
-        <p:nvSpPr>
-          <p:cNvPr id="8" name="사각형: 둥근 모서리 7">
-            <a:extLst>
-              <a:ext uri="{FF2B5EF4-FFF2-40B4-BE49-F238E27FC236}">
-                <a16:creationId xmlns:a16="http://schemas.microsoft.com/office/drawing/2014/main" id="{1E31FD0C-4EF9-EBAF-04A3-99F55D088448}"/>
-              </a:ext>
-            </a:extLst>
-          </p:cNvPr>
-          <p:cNvSpPr/>
-          <p:nvPr/>
-        </p:nvSpPr>
-        <p:spPr>
-          <a:xfrm>
-            <a:off x="4797972" y="3052939"/>
-            <a:ext cx="2596055" cy="752118"/>
-          </a:xfrm>
-          <a:prstGeom prst="roundRect">
-            <a:avLst/>
-          </a:prstGeom>
-          <a:noFill/>
-          <a:ln w="38100">
-            <a:solidFill>
-              <a:srgbClr val="FFC000"/>
-            </a:solidFill>
-          </a:ln>
-        </p:spPr>
-        <p:style>
-          <a:lnRef idx="2">
-            <a:schemeClr val="accent1">
-              <a:shade val="15000"/>
-            </a:schemeClr>
-          </a:lnRef>
-          <a:fillRef idx="1">
-            <a:schemeClr val="accent1"/>
-          </a:fillRef>
-          <a:effectRef idx="0">
-            <a:schemeClr val="accent1"/>
-          </a:effectRef>
-          <a:fontRef idx="minor">
-            <a:schemeClr val="lt1"/>
-          </a:fontRef>
-        </p:style>
-        <p:txBody>
-          <a:bodyPr rtlCol="0" anchor="ctr"/>
-          <a:lstStyle/>
-          <a:p>
-            <a:pPr algn="ctr"/>
-            <a:r>
-              <a:rPr lang="en-US" altLang="ko-KR" dirty="0">
-                <a:solidFill>
-                  <a:schemeClr val="tx1"/>
-                </a:solidFill>
-              </a:rPr>
-              <a:t>Raspberry Pi 4G – Pi1</a:t>
-            </a:r>
-            <a:endParaRPr lang="ko-KR" altLang="en-US" dirty="0">
-              <a:solidFill>
-                <a:schemeClr val="tx1"/>
-              </a:solidFill>
-            </a:endParaRPr>
-          </a:p>
-        </p:txBody>
-      </p:sp>
-      <p:sp>
-        <p:nvSpPr>
-          <p:cNvPr id="9" name="사각형: 둥근 모서리 8">
-            <a:extLst>
-              <a:ext uri="{FF2B5EF4-FFF2-40B4-BE49-F238E27FC236}">
-                <a16:creationId xmlns:a16="http://schemas.microsoft.com/office/drawing/2014/main" id="{8F390FF4-2364-589C-A9E0-95E3BDE5E4BB}"/>
-              </a:ext>
-            </a:extLst>
-          </p:cNvPr>
-          <p:cNvSpPr/>
-          <p:nvPr/>
-        </p:nvSpPr>
-        <p:spPr>
-          <a:xfrm>
-            <a:off x="9194183" y="3052939"/>
-            <a:ext cx="2596055" cy="752118"/>
-          </a:xfrm>
-          <a:prstGeom prst="roundRect">
-            <a:avLst/>
-          </a:prstGeom>
-          <a:noFill/>
-          <a:ln w="38100">
-            <a:solidFill>
-              <a:srgbClr val="FFC000"/>
-            </a:solidFill>
-          </a:ln>
-        </p:spPr>
-        <p:style>
-          <a:lnRef idx="2">
-            <a:schemeClr val="accent1">
-              <a:shade val="15000"/>
-            </a:schemeClr>
-          </a:lnRef>
-          <a:fillRef idx="1">
-            <a:schemeClr val="accent1"/>
-          </a:fillRef>
-          <a:effectRef idx="0">
-            <a:schemeClr val="accent1"/>
-          </a:effectRef>
-          <a:fontRef idx="minor">
-            <a:schemeClr val="lt1"/>
-          </a:fontRef>
-        </p:style>
-        <p:txBody>
-          <a:bodyPr rtlCol="0" anchor="ctr"/>
-          <a:lstStyle/>
-          <a:p>
-            <a:pPr algn="ctr"/>
-            <a:r>
-              <a:rPr lang="en-US" altLang="ko-KR" dirty="0">
-                <a:solidFill>
-                  <a:schemeClr val="tx1"/>
-                </a:solidFill>
-              </a:rPr>
-              <a:t>PC</a:t>
-            </a:r>
-            <a:endParaRPr lang="ko-KR" altLang="en-US" dirty="0">
-              <a:solidFill>
-                <a:schemeClr val="tx1"/>
-              </a:solidFill>
-            </a:endParaRPr>
-          </a:p>
-        </p:txBody>
-      </p:sp>
-      <p:sp>
-        <p:nvSpPr>
-          <p:cNvPr id="10" name="TextBox 9">
-            <a:extLst>
-              <a:ext uri="{FF2B5EF4-FFF2-40B4-BE49-F238E27FC236}">
-                <a16:creationId xmlns:a16="http://schemas.microsoft.com/office/drawing/2014/main" id="{050013E9-2513-BD1A-8141-F8ACB4B6405B}"/>
-              </a:ext>
-            </a:extLst>
-          </p:cNvPr>
-          <p:cNvSpPr txBox="1"/>
-          <p:nvPr/>
-        </p:nvSpPr>
-        <p:spPr>
-          <a:xfrm>
-            <a:off x="4900245" y="2806718"/>
-            <a:ext cx="715382" cy="246221"/>
-          </a:xfrm>
-          <a:prstGeom prst="rect">
-            <a:avLst/>
-          </a:prstGeom>
-          <a:noFill/>
-        </p:spPr>
-        <p:txBody>
-          <a:bodyPr wrap="square" rtlCol="0">
-            <a:spAutoFit/>
-          </a:bodyPr>
-          <a:lstStyle/>
-          <a:p>
-            <a:r>
-              <a:rPr lang="en-US" altLang="ko-KR" sz="1000" dirty="0"/>
-              <a:t>&lt; AGV &gt;</a:t>
-            </a:r>
-            <a:endParaRPr lang="ko-KR" altLang="en-US" sz="1000" dirty="0"/>
-          </a:p>
-        </p:txBody>
-      </p:sp>
-      <p:sp>
-        <p:nvSpPr>
-          <p:cNvPr id="12" name="TextBox 11">
-            <a:extLst>
-              <a:ext uri="{FF2B5EF4-FFF2-40B4-BE49-F238E27FC236}">
-                <a16:creationId xmlns:a16="http://schemas.microsoft.com/office/drawing/2014/main" id="{B6623604-A3F9-FB8D-C9F1-B49926E6EBAB}"/>
-              </a:ext>
-            </a:extLst>
-          </p:cNvPr>
-          <p:cNvSpPr txBox="1"/>
-          <p:nvPr/>
-        </p:nvSpPr>
-        <p:spPr>
-          <a:xfrm>
-            <a:off x="508550" y="2806718"/>
-            <a:ext cx="1037005" cy="246221"/>
-          </a:xfrm>
-          <a:prstGeom prst="rect">
-            <a:avLst/>
-          </a:prstGeom>
-          <a:noFill/>
-        </p:spPr>
-        <p:txBody>
-          <a:bodyPr wrap="square" rtlCol="0">
-            <a:spAutoFit/>
-          </a:bodyPr>
-          <a:lstStyle/>
-          <a:p>
-            <a:r>
-              <a:rPr lang="en-US" altLang="ko-KR" sz="1000" dirty="0"/>
-              <a:t>&lt; </a:t>
-            </a:r>
-            <a:r>
-              <a:rPr lang="ko-KR" altLang="en-US" sz="1000" dirty="0"/>
-              <a:t>추가 </a:t>
-            </a:r>
-            <a:r>
-              <a:rPr lang="en-US" altLang="ko-KR" sz="1000" dirty="0"/>
-              <a:t>SBC  &gt;</a:t>
-            </a:r>
-            <a:endParaRPr lang="ko-KR" altLang="en-US" sz="1000" dirty="0"/>
-          </a:p>
-        </p:txBody>
-      </p:sp>
-      <p:sp>
-        <p:nvSpPr>
-          <p:cNvPr id="13" name="TextBox 12">
-            <a:extLst>
-              <a:ext uri="{FF2B5EF4-FFF2-40B4-BE49-F238E27FC236}">
-                <a16:creationId xmlns:a16="http://schemas.microsoft.com/office/drawing/2014/main" id="{94616CB7-B3FB-4B76-9925-8B949F4E51DD}"/>
-              </a:ext>
-            </a:extLst>
-          </p:cNvPr>
-          <p:cNvSpPr txBox="1"/>
-          <p:nvPr/>
-        </p:nvSpPr>
-        <p:spPr>
-          <a:xfrm>
-            <a:off x="9296456" y="2806718"/>
-            <a:ext cx="1037005" cy="246221"/>
-          </a:xfrm>
-          <a:prstGeom prst="rect">
-            <a:avLst/>
-          </a:prstGeom>
-          <a:noFill/>
-        </p:spPr>
-        <p:txBody>
-          <a:bodyPr wrap="square" rtlCol="0">
-            <a:spAutoFit/>
-          </a:bodyPr>
-          <a:lstStyle/>
-          <a:p>
-            <a:r>
-              <a:rPr lang="en-US" altLang="ko-KR" sz="1000" dirty="0"/>
-              <a:t>&lt; </a:t>
-            </a:r>
-            <a:r>
-              <a:rPr lang="ko-KR" altLang="en-US" sz="1000" dirty="0"/>
-              <a:t>듀얼 부팅</a:t>
-            </a:r>
-            <a:r>
-              <a:rPr lang="en-US" altLang="ko-KR" sz="1000" dirty="0"/>
-              <a:t> &gt;</a:t>
-            </a:r>
-            <a:endParaRPr lang="ko-KR" altLang="en-US" sz="1000" dirty="0"/>
-          </a:p>
-        </p:txBody>
-      </p:sp>
-      <p:cxnSp>
-        <p:nvCxnSpPr>
-          <p:cNvPr id="15" name="직선 화살표 연결선 14">
-            <a:extLst>
-              <a:ext uri="{FF2B5EF4-FFF2-40B4-BE49-F238E27FC236}">
-                <a16:creationId xmlns:a16="http://schemas.microsoft.com/office/drawing/2014/main" id="{C1F48571-D851-4AD8-EE52-330370C9576B}"/>
-              </a:ext>
-            </a:extLst>
-          </p:cNvPr>
-          <p:cNvCxnSpPr>
-            <a:stCxn id="3" idx="3"/>
-            <a:endCxn id="8" idx="1"/>
-          </p:cNvCxnSpPr>
-          <p:nvPr/>
-        </p:nvCxnSpPr>
-        <p:spPr>
-          <a:xfrm>
-            <a:off x="2997816" y="3428998"/>
-            <a:ext cx="1800156" cy="0"/>
-          </a:xfrm>
-          <a:prstGeom prst="straightConnector1">
-            <a:avLst/>
-          </a:prstGeom>
-          <a:ln w="38100">
-            <a:solidFill>
-              <a:schemeClr val="tx1"/>
-            </a:solidFill>
-            <a:headEnd type="triangle"/>
-            <a:tailEnd type="triangle"/>
-          </a:ln>
-        </p:spPr>
-        <p:style>
-          <a:lnRef idx="2">
-            <a:schemeClr val="accent1"/>
-          </a:lnRef>
-          <a:fillRef idx="0">
-            <a:schemeClr val="accent1"/>
-          </a:fillRef>
-          <a:effectRef idx="1">
-            <a:schemeClr val="accent1"/>
-          </a:effectRef>
-          <a:fontRef idx="minor">
-            <a:schemeClr val="tx1"/>
-          </a:fontRef>
-        </p:style>
-      </p:cxnSp>
-      <p:cxnSp>
-        <p:nvCxnSpPr>
-          <p:cNvPr id="16" name="직선 화살표 연결선 15">
-            <a:extLst>
-              <a:ext uri="{FF2B5EF4-FFF2-40B4-BE49-F238E27FC236}">
-                <a16:creationId xmlns:a16="http://schemas.microsoft.com/office/drawing/2014/main" id="{F8049788-EB32-A1F7-D685-DF7B74D093E4}"/>
-              </a:ext>
-            </a:extLst>
-          </p:cNvPr>
-          <p:cNvCxnSpPr>
-            <a:cxnSpLocks/>
-            <a:stCxn id="8" idx="3"/>
-            <a:endCxn id="9" idx="1"/>
-          </p:cNvCxnSpPr>
-          <p:nvPr/>
-        </p:nvCxnSpPr>
-        <p:spPr>
-          <a:xfrm>
-            <a:off x="7394027" y="3428998"/>
-            <a:ext cx="1800156" cy="0"/>
-          </a:xfrm>
-          <a:prstGeom prst="straightConnector1">
-            <a:avLst/>
-          </a:prstGeom>
-          <a:ln w="38100">
-            <a:solidFill>
-              <a:schemeClr val="tx1"/>
-            </a:solidFill>
-            <a:headEnd type="triangle"/>
-            <a:tailEnd type="triangle"/>
-          </a:ln>
-        </p:spPr>
-        <p:style>
-          <a:lnRef idx="2">
-            <a:schemeClr val="accent1"/>
-          </a:lnRef>
-          <a:fillRef idx="0">
-            <a:schemeClr val="accent1"/>
-          </a:fillRef>
-          <a:effectRef idx="1">
-            <a:schemeClr val="accent1"/>
-          </a:effectRef>
-          <a:fontRef idx="minor">
-            <a:schemeClr val="tx1"/>
-          </a:fontRef>
-        </p:style>
-      </p:cxnSp>
-      <p:sp>
-        <p:nvSpPr>
-          <p:cNvPr id="19" name="TextBox 18">
-            <a:extLst>
-              <a:ext uri="{FF2B5EF4-FFF2-40B4-BE49-F238E27FC236}">
-                <a16:creationId xmlns:a16="http://schemas.microsoft.com/office/drawing/2014/main" id="{939C2C6E-DA98-93DE-83B9-80A70F4E97FB}"/>
-              </a:ext>
-            </a:extLst>
-          </p:cNvPr>
-          <p:cNvSpPr txBox="1"/>
-          <p:nvPr/>
-        </p:nvSpPr>
-        <p:spPr>
-          <a:xfrm>
-            <a:off x="3520664" y="3182777"/>
-            <a:ext cx="754459" cy="246221"/>
-          </a:xfrm>
-          <a:prstGeom prst="rect">
-            <a:avLst/>
-          </a:prstGeom>
-          <a:noFill/>
-        </p:spPr>
-        <p:txBody>
-          <a:bodyPr wrap="square" rtlCol="0">
-            <a:spAutoFit/>
-          </a:bodyPr>
-          <a:lstStyle/>
-          <a:p>
-            <a:r>
-              <a:rPr lang="en-US" altLang="ko-KR" sz="1000" dirty="0"/>
-              <a:t>LAN </a:t>
-            </a:r>
-            <a:r>
-              <a:rPr lang="ko-KR" altLang="en-US" sz="1000" dirty="0"/>
-              <a:t>통신</a:t>
-            </a:r>
-          </a:p>
-        </p:txBody>
-      </p:sp>
-      <p:sp>
-        <p:nvSpPr>
-          <p:cNvPr id="20" name="TextBox 19">
-            <a:extLst>
-              <a:ext uri="{FF2B5EF4-FFF2-40B4-BE49-F238E27FC236}">
-                <a16:creationId xmlns:a16="http://schemas.microsoft.com/office/drawing/2014/main" id="{285C9794-602C-17E0-DCDA-CC0D4A2FAC0E}"/>
-              </a:ext>
-            </a:extLst>
-          </p:cNvPr>
-          <p:cNvSpPr txBox="1"/>
-          <p:nvPr/>
-        </p:nvSpPr>
-        <p:spPr>
-          <a:xfrm>
-            <a:off x="7924265" y="3182776"/>
-            <a:ext cx="739680" cy="246221"/>
-          </a:xfrm>
-          <a:prstGeom prst="rect">
-            <a:avLst/>
-          </a:prstGeom>
-          <a:noFill/>
-        </p:spPr>
-        <p:txBody>
-          <a:bodyPr wrap="square" rtlCol="0">
-            <a:spAutoFit/>
-          </a:bodyPr>
-          <a:lstStyle/>
-          <a:p>
-            <a:r>
-              <a:rPr lang="en-US" altLang="ko-KR" sz="1000"/>
-              <a:t>WIFI </a:t>
-            </a:r>
-            <a:r>
-              <a:rPr lang="ko-KR" altLang="en-US" sz="1000" dirty="0"/>
-              <a:t>통신</a:t>
-            </a:r>
-            <a:endParaRPr lang="en-US" altLang="ko-KR" sz="1000" dirty="0"/>
-          </a:p>
-        </p:txBody>
-      </p:sp>
-      <p:sp>
-        <p:nvSpPr>
           <p:cNvPr id="21" name="TextBox 20">
             <a:extLst>
               <a:ext uri="{FF2B5EF4-FFF2-40B4-BE49-F238E27FC236}">
@@ -4654,432 +4166,942 @@
           </a:p>
         </p:txBody>
       </p:sp>
-      <p:sp>
-        <p:nvSpPr>
-          <p:cNvPr id="22" name="TextBox 21">
-            <a:extLst>
-              <a:ext uri="{FF2B5EF4-FFF2-40B4-BE49-F238E27FC236}">
-                <a16:creationId xmlns:a16="http://schemas.microsoft.com/office/drawing/2014/main" id="{6BD0AF4F-4158-FCF4-DC33-A64B519A03CC}"/>
-              </a:ext>
-            </a:extLst>
-          </p:cNvPr>
-          <p:cNvSpPr txBox="1"/>
+      <p:grpSp>
+        <p:nvGrpSpPr>
+          <p:cNvPr id="4" name="그룹 3">
+            <a:extLst>
+              <a:ext uri="{FF2B5EF4-FFF2-40B4-BE49-F238E27FC236}">
+                <a16:creationId xmlns:a16="http://schemas.microsoft.com/office/drawing/2014/main" id="{CE3D972F-4EEC-486A-A768-196BC5A13006}"/>
+              </a:ext>
+            </a:extLst>
+          </p:cNvPr>
+          <p:cNvGrpSpPr/>
           <p:nvPr/>
-        </p:nvSpPr>
-        <p:spPr>
+        </p:nvGrpSpPr>
+        <p:grpSpPr>
           <a:xfrm>
-            <a:off x="508550" y="3825671"/>
-            <a:ext cx="2389196" cy="692497"/>
+            <a:off x="401761" y="2016226"/>
+            <a:ext cx="11388477" cy="2501942"/>
+            <a:chOff x="401761" y="2016226"/>
+            <a:chExt cx="11388477" cy="2501942"/>
           </a:xfrm>
-          <a:prstGeom prst="rect">
-            <a:avLst/>
-          </a:prstGeom>
-          <a:noFill/>
-        </p:spPr>
-        <p:txBody>
-          <a:bodyPr wrap="square" rtlCol="0">
-            <a:spAutoFit/>
-          </a:bodyPr>
-          <a:lstStyle/>
-          <a:p>
-            <a:r>
-              <a:rPr lang="en-US" altLang="ko-KR" sz="1300" dirty="0"/>
-              <a:t>IP</a:t>
-            </a:r>
-          </a:p>
-          <a:p>
-            <a:r>
-              <a:rPr lang="en-US" altLang="ko-KR" sz="1300" dirty="0"/>
-              <a:t>10.0.0.2 (</a:t>
-            </a:r>
-            <a:r>
-              <a:rPr lang="ko-KR" altLang="en-US" sz="1300" dirty="0"/>
-              <a:t>유선</a:t>
-            </a:r>
-            <a:r>
-              <a:rPr lang="en-US" altLang="ko-KR" sz="1300" dirty="0"/>
-              <a:t>) Ethernet</a:t>
-            </a:r>
-          </a:p>
-          <a:p>
-            <a:r>
-              <a:rPr lang="en-US" altLang="ko-KR" sz="1300" dirty="0"/>
-              <a:t>172.30.1.55 (</a:t>
-            </a:r>
-            <a:r>
-              <a:rPr lang="ko-KR" altLang="en-US" sz="1300" dirty="0"/>
-              <a:t>무선</a:t>
-            </a:r>
-            <a:r>
-              <a:rPr lang="en-US" altLang="ko-KR" sz="1300" dirty="0"/>
-              <a:t>)</a:t>
-            </a:r>
-          </a:p>
-        </p:txBody>
-      </p:sp>
-      <p:sp>
-        <p:nvSpPr>
-          <p:cNvPr id="23" name="TextBox 22">
-            <a:extLst>
-              <a:ext uri="{FF2B5EF4-FFF2-40B4-BE49-F238E27FC236}">
-                <a16:creationId xmlns:a16="http://schemas.microsoft.com/office/drawing/2014/main" id="{00A57F11-60E7-C1D8-C7E2-E03DC0FB7A13}"/>
-              </a:ext>
-            </a:extLst>
-          </p:cNvPr>
-          <p:cNvSpPr txBox="1"/>
-          <p:nvPr/>
-        </p:nvSpPr>
-        <p:spPr>
-          <a:xfrm>
-            <a:off x="4901401" y="3825671"/>
-            <a:ext cx="2389196" cy="692497"/>
-          </a:xfrm>
-          <a:prstGeom prst="rect">
-            <a:avLst/>
-          </a:prstGeom>
-          <a:noFill/>
-        </p:spPr>
-        <p:txBody>
-          <a:bodyPr wrap="square" rtlCol="0">
-            <a:spAutoFit/>
-          </a:bodyPr>
-          <a:lstStyle/>
-          <a:p>
-            <a:r>
-              <a:rPr lang="en-US" altLang="ko-KR" sz="1300" dirty="0"/>
-              <a:t>IP</a:t>
-            </a:r>
-          </a:p>
-          <a:p>
-            <a:r>
-              <a:rPr lang="en-US" altLang="ko-KR" sz="1300" dirty="0"/>
-              <a:t>10.0.0.1 (</a:t>
-            </a:r>
-            <a:r>
-              <a:rPr lang="ko-KR" altLang="en-US" sz="1300" dirty="0"/>
-              <a:t>유선</a:t>
-            </a:r>
-            <a:r>
-              <a:rPr lang="en-US" altLang="ko-KR" sz="1300" dirty="0"/>
-              <a:t>) Ethernet</a:t>
-            </a:r>
-          </a:p>
-          <a:p>
-            <a:r>
-              <a:rPr lang="en-US" altLang="ko-KR" sz="1300" dirty="0"/>
-              <a:t>172.30.1.10 (</a:t>
-            </a:r>
-            <a:r>
-              <a:rPr lang="ko-KR" altLang="en-US" sz="1300" dirty="0"/>
-              <a:t>무선</a:t>
-            </a:r>
-            <a:r>
-              <a:rPr lang="en-US" altLang="ko-KR" sz="1300" dirty="0"/>
-              <a:t>)</a:t>
-            </a:r>
-          </a:p>
-        </p:txBody>
-      </p:sp>
-      <p:sp>
-        <p:nvSpPr>
-          <p:cNvPr id="24" name="TextBox 23">
-            <a:extLst>
-              <a:ext uri="{FF2B5EF4-FFF2-40B4-BE49-F238E27FC236}">
-                <a16:creationId xmlns:a16="http://schemas.microsoft.com/office/drawing/2014/main" id="{36D3AF90-618A-40D6-B4EB-F3C3B5688B70}"/>
-              </a:ext>
-            </a:extLst>
-          </p:cNvPr>
-          <p:cNvSpPr txBox="1"/>
-          <p:nvPr/>
-        </p:nvSpPr>
-        <p:spPr>
-          <a:xfrm>
-            <a:off x="9297612" y="3825671"/>
-            <a:ext cx="2389196" cy="492443"/>
-          </a:xfrm>
-          <a:prstGeom prst="rect">
-            <a:avLst/>
-          </a:prstGeom>
-          <a:noFill/>
-        </p:spPr>
-        <p:txBody>
-          <a:bodyPr wrap="square" rtlCol="0">
-            <a:spAutoFit/>
-          </a:bodyPr>
-          <a:lstStyle/>
-          <a:p>
-            <a:r>
-              <a:rPr lang="en-US" altLang="ko-KR" sz="1300" dirty="0"/>
-              <a:t>IP</a:t>
-            </a:r>
-          </a:p>
-          <a:p>
-            <a:r>
-              <a:rPr lang="en-US" altLang="ko-KR" sz="1300" dirty="0"/>
-              <a:t>172.30.1.85 (</a:t>
-            </a:r>
-            <a:r>
-              <a:rPr lang="ko-KR" altLang="en-US" sz="1300" dirty="0"/>
-              <a:t>무선</a:t>
-            </a:r>
-            <a:r>
-              <a:rPr lang="en-US" altLang="ko-KR" sz="1300" dirty="0"/>
-              <a:t>)</a:t>
-            </a:r>
-          </a:p>
-        </p:txBody>
-      </p:sp>
-      <p:cxnSp>
-        <p:nvCxnSpPr>
-          <p:cNvPr id="28" name="직선 화살표 연결선 27">
-            <a:extLst>
-              <a:ext uri="{FF2B5EF4-FFF2-40B4-BE49-F238E27FC236}">
-                <a16:creationId xmlns:a16="http://schemas.microsoft.com/office/drawing/2014/main" id="{3B720251-C464-4CD0-3539-7182C25B6BEB}"/>
-              </a:ext>
-            </a:extLst>
-          </p:cNvPr>
-          <p:cNvCxnSpPr>
-            <a:cxnSpLocks/>
-            <a:stCxn id="3" idx="0"/>
-          </p:cNvCxnSpPr>
-          <p:nvPr/>
-        </p:nvCxnSpPr>
-        <p:spPr>
-          <a:xfrm flipV="1">
-            <a:off x="1699789" y="2459865"/>
-            <a:ext cx="0" cy="593074"/>
-          </a:xfrm>
-          <a:prstGeom prst="straightConnector1">
-            <a:avLst/>
-          </a:prstGeom>
-          <a:ln w="38100">
-            <a:solidFill>
+        </p:grpSpPr>
+        <p:sp>
+          <p:nvSpPr>
+            <p:cNvPr id="3" name="사각형: 둥근 모서리 2">
+              <a:extLst>
+                <a:ext uri="{FF2B5EF4-FFF2-40B4-BE49-F238E27FC236}">
+                  <a16:creationId xmlns:a16="http://schemas.microsoft.com/office/drawing/2014/main" id="{E678C480-87C6-F782-A58C-2745CF571189}"/>
+                </a:ext>
+              </a:extLst>
+            </p:cNvPr>
+            <p:cNvSpPr/>
+            <p:nvPr/>
+          </p:nvSpPr>
+          <p:spPr>
+            <a:xfrm>
+              <a:off x="401761" y="3052939"/>
+              <a:ext cx="2596055" cy="752118"/>
+            </a:xfrm>
+            <a:prstGeom prst="roundRect">
+              <a:avLst/>
+            </a:prstGeom>
+            <a:noFill/>
+            <a:ln w="38100">
+              <a:solidFill>
+                <a:srgbClr val="FFC000"/>
+              </a:solidFill>
+            </a:ln>
+          </p:spPr>
+          <p:style>
+            <a:lnRef idx="2">
+              <a:schemeClr val="accent1">
+                <a:shade val="15000"/>
+              </a:schemeClr>
+            </a:lnRef>
+            <a:fillRef idx="1">
+              <a:schemeClr val="accent1"/>
+            </a:fillRef>
+            <a:effectRef idx="0">
+              <a:schemeClr val="accent1"/>
+            </a:effectRef>
+            <a:fontRef idx="minor">
+              <a:schemeClr val="lt1"/>
+            </a:fontRef>
+          </p:style>
+          <p:txBody>
+            <a:bodyPr rtlCol="0" anchor="ctr"/>
+            <a:lstStyle/>
+            <a:p>
+              <a:pPr algn="ctr"/>
+              <a:r>
+                <a:rPr lang="en-US" altLang="ko-KR" dirty="0">
+                  <a:solidFill>
+                    <a:schemeClr val="tx1"/>
+                  </a:solidFill>
+                </a:rPr>
+                <a:t>Raspberry Pi 4G – Pi2</a:t>
+              </a:r>
+              <a:endParaRPr lang="ko-KR" altLang="en-US" dirty="0">
+                <a:solidFill>
+                  <a:schemeClr val="tx1"/>
+                </a:solidFill>
+              </a:endParaRPr>
+            </a:p>
+          </p:txBody>
+        </p:sp>
+        <p:sp>
+          <p:nvSpPr>
+            <p:cNvPr id="8" name="사각형: 둥근 모서리 7">
+              <a:extLst>
+                <a:ext uri="{FF2B5EF4-FFF2-40B4-BE49-F238E27FC236}">
+                  <a16:creationId xmlns:a16="http://schemas.microsoft.com/office/drawing/2014/main" id="{1E31FD0C-4EF9-EBAF-04A3-99F55D088448}"/>
+                </a:ext>
+              </a:extLst>
+            </p:cNvPr>
+            <p:cNvSpPr/>
+            <p:nvPr/>
+          </p:nvSpPr>
+          <p:spPr>
+            <a:xfrm>
+              <a:off x="4797972" y="3052939"/>
+              <a:ext cx="2596055" cy="752118"/>
+            </a:xfrm>
+            <a:prstGeom prst="roundRect">
+              <a:avLst/>
+            </a:prstGeom>
+            <a:noFill/>
+            <a:ln w="38100">
+              <a:solidFill>
+                <a:srgbClr val="FFC000"/>
+              </a:solidFill>
+            </a:ln>
+          </p:spPr>
+          <p:style>
+            <a:lnRef idx="2">
+              <a:schemeClr val="accent1">
+                <a:shade val="15000"/>
+              </a:schemeClr>
+            </a:lnRef>
+            <a:fillRef idx="1">
+              <a:schemeClr val="accent1"/>
+            </a:fillRef>
+            <a:effectRef idx="0">
+              <a:schemeClr val="accent1"/>
+            </a:effectRef>
+            <a:fontRef idx="minor">
+              <a:schemeClr val="lt1"/>
+            </a:fontRef>
+          </p:style>
+          <p:txBody>
+            <a:bodyPr rtlCol="0" anchor="ctr"/>
+            <a:lstStyle/>
+            <a:p>
+              <a:pPr algn="ctr"/>
+              <a:r>
+                <a:rPr lang="en-US" altLang="ko-KR" dirty="0">
+                  <a:solidFill>
+                    <a:schemeClr val="tx1"/>
+                  </a:solidFill>
+                </a:rPr>
+                <a:t>Raspberry Pi 4G – Pi1</a:t>
+              </a:r>
+              <a:endParaRPr lang="ko-KR" altLang="en-US" dirty="0">
+                <a:solidFill>
+                  <a:schemeClr val="tx1"/>
+                </a:solidFill>
+              </a:endParaRPr>
+            </a:p>
+          </p:txBody>
+        </p:sp>
+        <p:sp>
+          <p:nvSpPr>
+            <p:cNvPr id="9" name="사각형: 둥근 모서리 8">
+              <a:extLst>
+                <a:ext uri="{FF2B5EF4-FFF2-40B4-BE49-F238E27FC236}">
+                  <a16:creationId xmlns:a16="http://schemas.microsoft.com/office/drawing/2014/main" id="{8F390FF4-2364-589C-A9E0-95E3BDE5E4BB}"/>
+                </a:ext>
+              </a:extLst>
+            </p:cNvPr>
+            <p:cNvSpPr/>
+            <p:nvPr/>
+          </p:nvSpPr>
+          <p:spPr>
+            <a:xfrm>
+              <a:off x="9194183" y="3052939"/>
+              <a:ext cx="2596055" cy="752118"/>
+            </a:xfrm>
+            <a:prstGeom prst="roundRect">
+              <a:avLst/>
+            </a:prstGeom>
+            <a:noFill/>
+            <a:ln w="38100">
+              <a:solidFill>
+                <a:srgbClr val="FFC000"/>
+              </a:solidFill>
+            </a:ln>
+          </p:spPr>
+          <p:style>
+            <a:lnRef idx="2">
+              <a:schemeClr val="accent1">
+                <a:shade val="15000"/>
+              </a:schemeClr>
+            </a:lnRef>
+            <a:fillRef idx="1">
+              <a:schemeClr val="accent1"/>
+            </a:fillRef>
+            <a:effectRef idx="0">
+              <a:schemeClr val="accent1"/>
+            </a:effectRef>
+            <a:fontRef idx="minor">
+              <a:schemeClr val="lt1"/>
+            </a:fontRef>
+          </p:style>
+          <p:txBody>
+            <a:bodyPr rtlCol="0" anchor="ctr"/>
+            <a:lstStyle/>
+            <a:p>
+              <a:pPr algn="ctr"/>
+              <a:r>
+                <a:rPr lang="en-US" altLang="ko-KR" dirty="0">
+                  <a:solidFill>
+                    <a:schemeClr val="tx1"/>
+                  </a:solidFill>
+                </a:rPr>
+                <a:t>PC</a:t>
+              </a:r>
+              <a:endParaRPr lang="ko-KR" altLang="en-US" dirty="0">
+                <a:solidFill>
+                  <a:schemeClr val="tx1"/>
+                </a:solidFill>
+              </a:endParaRPr>
+            </a:p>
+          </p:txBody>
+        </p:sp>
+        <p:sp>
+          <p:nvSpPr>
+            <p:cNvPr id="10" name="TextBox 9">
+              <a:extLst>
+                <a:ext uri="{FF2B5EF4-FFF2-40B4-BE49-F238E27FC236}">
+                  <a16:creationId xmlns:a16="http://schemas.microsoft.com/office/drawing/2014/main" id="{050013E9-2513-BD1A-8141-F8ACB4B6405B}"/>
+                </a:ext>
+              </a:extLst>
+            </p:cNvPr>
+            <p:cNvSpPr txBox="1"/>
+            <p:nvPr/>
+          </p:nvSpPr>
+          <p:spPr>
+            <a:xfrm>
+              <a:off x="4900245" y="2806718"/>
+              <a:ext cx="715382" cy="246221"/>
+            </a:xfrm>
+            <a:prstGeom prst="rect">
+              <a:avLst/>
+            </a:prstGeom>
+            <a:noFill/>
+          </p:spPr>
+          <p:txBody>
+            <a:bodyPr wrap="square" rtlCol="0">
+              <a:spAutoFit/>
+            </a:bodyPr>
+            <a:lstStyle/>
+            <a:p>
+              <a:r>
+                <a:rPr lang="en-US" altLang="ko-KR" sz="1000" dirty="0"/>
+                <a:t>&lt; AGV &gt;</a:t>
+              </a:r>
+              <a:endParaRPr lang="ko-KR" altLang="en-US" sz="1000" dirty="0"/>
+            </a:p>
+          </p:txBody>
+        </p:sp>
+        <p:sp>
+          <p:nvSpPr>
+            <p:cNvPr id="12" name="TextBox 11">
+              <a:extLst>
+                <a:ext uri="{FF2B5EF4-FFF2-40B4-BE49-F238E27FC236}">
+                  <a16:creationId xmlns:a16="http://schemas.microsoft.com/office/drawing/2014/main" id="{B6623604-A3F9-FB8D-C9F1-B49926E6EBAB}"/>
+                </a:ext>
+              </a:extLst>
+            </p:cNvPr>
+            <p:cNvSpPr txBox="1"/>
+            <p:nvPr/>
+          </p:nvSpPr>
+          <p:spPr>
+            <a:xfrm>
+              <a:off x="508550" y="2806718"/>
+              <a:ext cx="1037005" cy="246221"/>
+            </a:xfrm>
+            <a:prstGeom prst="rect">
+              <a:avLst/>
+            </a:prstGeom>
+            <a:noFill/>
+          </p:spPr>
+          <p:txBody>
+            <a:bodyPr wrap="square" rtlCol="0">
+              <a:spAutoFit/>
+            </a:bodyPr>
+            <a:lstStyle/>
+            <a:p>
+              <a:r>
+                <a:rPr lang="en-US" altLang="ko-KR" sz="1000" dirty="0"/>
+                <a:t>&lt; </a:t>
+              </a:r>
+              <a:r>
+                <a:rPr lang="ko-KR" altLang="en-US" sz="1000" dirty="0"/>
+                <a:t>추가 </a:t>
+              </a:r>
+              <a:r>
+                <a:rPr lang="en-US" altLang="ko-KR" sz="1000" dirty="0"/>
+                <a:t>SBC  &gt;</a:t>
+              </a:r>
+              <a:endParaRPr lang="ko-KR" altLang="en-US" sz="1000" dirty="0"/>
+            </a:p>
+          </p:txBody>
+        </p:sp>
+        <p:sp>
+          <p:nvSpPr>
+            <p:cNvPr id="13" name="TextBox 12">
+              <a:extLst>
+                <a:ext uri="{FF2B5EF4-FFF2-40B4-BE49-F238E27FC236}">
+                  <a16:creationId xmlns:a16="http://schemas.microsoft.com/office/drawing/2014/main" id="{94616CB7-B3FB-4B76-9925-8B949F4E51DD}"/>
+                </a:ext>
+              </a:extLst>
+            </p:cNvPr>
+            <p:cNvSpPr txBox="1"/>
+            <p:nvPr/>
+          </p:nvSpPr>
+          <p:spPr>
+            <a:xfrm>
+              <a:off x="9296456" y="2806718"/>
+              <a:ext cx="1037005" cy="246221"/>
+            </a:xfrm>
+            <a:prstGeom prst="rect">
+              <a:avLst/>
+            </a:prstGeom>
+            <a:noFill/>
+          </p:spPr>
+          <p:txBody>
+            <a:bodyPr wrap="square" rtlCol="0">
+              <a:spAutoFit/>
+            </a:bodyPr>
+            <a:lstStyle/>
+            <a:p>
+              <a:r>
+                <a:rPr lang="en-US" altLang="ko-KR" sz="1000" dirty="0"/>
+                <a:t>&lt; </a:t>
+              </a:r>
+              <a:r>
+                <a:rPr lang="ko-KR" altLang="en-US" sz="1000" dirty="0"/>
+                <a:t>듀얼 부팅</a:t>
+              </a:r>
+              <a:r>
+                <a:rPr lang="en-US" altLang="ko-KR" sz="1000" dirty="0"/>
+                <a:t> &gt;</a:t>
+              </a:r>
+              <a:endParaRPr lang="ko-KR" altLang="en-US" sz="1000" dirty="0"/>
+            </a:p>
+          </p:txBody>
+        </p:sp>
+        <p:cxnSp>
+          <p:nvCxnSpPr>
+            <p:cNvPr id="15" name="직선 화살표 연결선 14">
+              <a:extLst>
+                <a:ext uri="{FF2B5EF4-FFF2-40B4-BE49-F238E27FC236}">
+                  <a16:creationId xmlns:a16="http://schemas.microsoft.com/office/drawing/2014/main" id="{C1F48571-D851-4AD8-EE52-330370C9576B}"/>
+                </a:ext>
+              </a:extLst>
+            </p:cNvPr>
+            <p:cNvCxnSpPr>
+              <a:cxnSpLocks/>
+              <a:stCxn id="3" idx="3"/>
+              <a:endCxn id="8" idx="1"/>
+            </p:cNvCxnSpPr>
+            <p:nvPr/>
+          </p:nvCxnSpPr>
+          <p:spPr>
+            <a:xfrm>
+              <a:off x="2997816" y="3428998"/>
+              <a:ext cx="1800156" cy="0"/>
+            </a:xfrm>
+            <a:prstGeom prst="straightConnector1">
+              <a:avLst/>
+            </a:prstGeom>
+            <a:ln w="38100">
+              <a:solidFill>
+                <a:schemeClr val="tx1"/>
+              </a:solidFill>
+              <a:headEnd type="triangle"/>
+              <a:tailEnd type="triangle"/>
+            </a:ln>
+          </p:spPr>
+          <p:style>
+            <a:lnRef idx="2">
+              <a:schemeClr val="accent1"/>
+            </a:lnRef>
+            <a:fillRef idx="0">
+              <a:schemeClr val="accent1"/>
+            </a:fillRef>
+            <a:effectRef idx="1">
+              <a:schemeClr val="accent1"/>
+            </a:effectRef>
+            <a:fontRef idx="minor">
               <a:schemeClr val="tx1"/>
-            </a:solidFill>
-            <a:tailEnd type="triangle"/>
-          </a:ln>
-        </p:spPr>
-        <p:style>
-          <a:lnRef idx="2">
-            <a:schemeClr val="accent1"/>
-          </a:lnRef>
-          <a:fillRef idx="0">
-            <a:schemeClr val="accent1"/>
-          </a:fillRef>
-          <a:effectRef idx="1">
-            <a:schemeClr val="accent1"/>
-          </a:effectRef>
-          <a:fontRef idx="minor">
-            <a:schemeClr val="tx1"/>
-          </a:fontRef>
-        </p:style>
-      </p:cxnSp>
-      <p:cxnSp>
-        <p:nvCxnSpPr>
-          <p:cNvPr id="31" name="직선 화살표 연결선 30">
-            <a:extLst>
-              <a:ext uri="{FF2B5EF4-FFF2-40B4-BE49-F238E27FC236}">
-                <a16:creationId xmlns:a16="http://schemas.microsoft.com/office/drawing/2014/main" id="{8B744147-E548-242D-B8CE-161E5E7522E3}"/>
-              </a:ext>
-            </a:extLst>
-          </p:cNvPr>
-          <p:cNvCxnSpPr>
-            <a:cxnSpLocks/>
-            <a:stCxn id="8" idx="0"/>
-          </p:cNvCxnSpPr>
-          <p:nvPr/>
-        </p:nvCxnSpPr>
-        <p:spPr>
-          <a:xfrm flipV="1">
-            <a:off x="6096000" y="2459865"/>
-            <a:ext cx="0" cy="593074"/>
-          </a:xfrm>
-          <a:prstGeom prst="straightConnector1">
-            <a:avLst/>
-          </a:prstGeom>
-          <a:ln w="38100">
-            <a:solidFill>
+            </a:fontRef>
+          </p:style>
+        </p:cxnSp>
+        <p:cxnSp>
+          <p:nvCxnSpPr>
+            <p:cNvPr id="16" name="직선 화살표 연결선 15">
+              <a:extLst>
+                <a:ext uri="{FF2B5EF4-FFF2-40B4-BE49-F238E27FC236}">
+                  <a16:creationId xmlns:a16="http://schemas.microsoft.com/office/drawing/2014/main" id="{F8049788-EB32-A1F7-D685-DF7B74D093E4}"/>
+                </a:ext>
+              </a:extLst>
+            </p:cNvPr>
+            <p:cNvCxnSpPr>
+              <a:cxnSpLocks/>
+              <a:stCxn id="8" idx="3"/>
+              <a:endCxn id="9" idx="1"/>
+            </p:cNvCxnSpPr>
+            <p:nvPr/>
+          </p:nvCxnSpPr>
+          <p:spPr>
+            <a:xfrm>
+              <a:off x="7394027" y="3428998"/>
+              <a:ext cx="1800156" cy="0"/>
+            </a:xfrm>
+            <a:prstGeom prst="straightConnector1">
+              <a:avLst/>
+            </a:prstGeom>
+            <a:ln w="38100">
+              <a:solidFill>
+                <a:schemeClr val="tx1"/>
+              </a:solidFill>
+              <a:headEnd type="triangle"/>
+              <a:tailEnd type="triangle"/>
+            </a:ln>
+          </p:spPr>
+          <p:style>
+            <a:lnRef idx="2">
+              <a:schemeClr val="accent1"/>
+            </a:lnRef>
+            <a:fillRef idx="0">
+              <a:schemeClr val="accent1"/>
+            </a:fillRef>
+            <a:effectRef idx="1">
+              <a:schemeClr val="accent1"/>
+            </a:effectRef>
+            <a:fontRef idx="minor">
               <a:schemeClr val="tx1"/>
-            </a:solidFill>
-            <a:tailEnd type="triangle"/>
-          </a:ln>
-        </p:spPr>
-        <p:style>
-          <a:lnRef idx="2">
-            <a:schemeClr val="accent1"/>
-          </a:lnRef>
-          <a:fillRef idx="0">
-            <a:schemeClr val="accent1"/>
-          </a:fillRef>
-          <a:effectRef idx="1">
-            <a:schemeClr val="accent1"/>
-          </a:effectRef>
-          <a:fontRef idx="minor">
-            <a:schemeClr val="tx1"/>
-          </a:fontRef>
-        </p:style>
-      </p:cxnSp>
-      <p:cxnSp>
-        <p:nvCxnSpPr>
-          <p:cNvPr id="34" name="직선 화살표 연결선 33">
-            <a:extLst>
-              <a:ext uri="{FF2B5EF4-FFF2-40B4-BE49-F238E27FC236}">
-                <a16:creationId xmlns:a16="http://schemas.microsoft.com/office/drawing/2014/main" id="{27AA610E-A92B-5365-85AC-207C396A21D4}"/>
-              </a:ext>
-            </a:extLst>
-          </p:cNvPr>
-          <p:cNvCxnSpPr>
-            <a:cxnSpLocks/>
-            <a:stCxn id="9" idx="0"/>
-          </p:cNvCxnSpPr>
-          <p:nvPr/>
-        </p:nvCxnSpPr>
-        <p:spPr>
-          <a:xfrm flipV="1">
-            <a:off x="10492211" y="2459865"/>
-            <a:ext cx="0" cy="593074"/>
-          </a:xfrm>
-          <a:prstGeom prst="straightConnector1">
-            <a:avLst/>
-          </a:prstGeom>
-          <a:ln w="38100">
-            <a:solidFill>
+            </a:fontRef>
+          </p:style>
+        </p:cxnSp>
+        <p:sp>
+          <p:nvSpPr>
+            <p:cNvPr id="19" name="TextBox 18">
+              <a:extLst>
+                <a:ext uri="{FF2B5EF4-FFF2-40B4-BE49-F238E27FC236}">
+                  <a16:creationId xmlns:a16="http://schemas.microsoft.com/office/drawing/2014/main" id="{939C2C6E-DA98-93DE-83B9-80A70F4E97FB}"/>
+                </a:ext>
+              </a:extLst>
+            </p:cNvPr>
+            <p:cNvSpPr txBox="1"/>
+            <p:nvPr/>
+          </p:nvSpPr>
+          <p:spPr>
+            <a:xfrm>
+              <a:off x="3520664" y="3182777"/>
+              <a:ext cx="754459" cy="246221"/>
+            </a:xfrm>
+            <a:prstGeom prst="rect">
+              <a:avLst/>
+            </a:prstGeom>
+            <a:noFill/>
+          </p:spPr>
+          <p:txBody>
+            <a:bodyPr wrap="square" rtlCol="0">
+              <a:spAutoFit/>
+            </a:bodyPr>
+            <a:lstStyle/>
+            <a:p>
+              <a:r>
+                <a:rPr lang="en-US" altLang="ko-KR" sz="1000" dirty="0"/>
+                <a:t>LAN </a:t>
+              </a:r>
+              <a:r>
+                <a:rPr lang="ko-KR" altLang="en-US" sz="1000" dirty="0"/>
+                <a:t>통신</a:t>
+              </a:r>
+            </a:p>
+          </p:txBody>
+        </p:sp>
+        <p:sp>
+          <p:nvSpPr>
+            <p:cNvPr id="20" name="TextBox 19">
+              <a:extLst>
+                <a:ext uri="{FF2B5EF4-FFF2-40B4-BE49-F238E27FC236}">
+                  <a16:creationId xmlns:a16="http://schemas.microsoft.com/office/drawing/2014/main" id="{285C9794-602C-17E0-DCDA-CC0D4A2FAC0E}"/>
+                </a:ext>
+              </a:extLst>
+            </p:cNvPr>
+            <p:cNvSpPr txBox="1"/>
+            <p:nvPr/>
+          </p:nvSpPr>
+          <p:spPr>
+            <a:xfrm>
+              <a:off x="7924265" y="3182776"/>
+              <a:ext cx="739680" cy="246221"/>
+            </a:xfrm>
+            <a:prstGeom prst="rect">
+              <a:avLst/>
+            </a:prstGeom>
+            <a:noFill/>
+          </p:spPr>
+          <p:txBody>
+            <a:bodyPr wrap="square" rtlCol="0">
+              <a:spAutoFit/>
+            </a:bodyPr>
+            <a:lstStyle/>
+            <a:p>
+              <a:r>
+                <a:rPr lang="en-US" altLang="ko-KR" sz="1000"/>
+                <a:t>WIFI </a:t>
+              </a:r>
+              <a:r>
+                <a:rPr lang="ko-KR" altLang="en-US" sz="1000" dirty="0"/>
+                <a:t>통신</a:t>
+              </a:r>
+              <a:endParaRPr lang="en-US" altLang="ko-KR" sz="1000" dirty="0"/>
+            </a:p>
+          </p:txBody>
+        </p:sp>
+        <p:sp>
+          <p:nvSpPr>
+            <p:cNvPr id="22" name="TextBox 21">
+              <a:extLst>
+                <a:ext uri="{FF2B5EF4-FFF2-40B4-BE49-F238E27FC236}">
+                  <a16:creationId xmlns:a16="http://schemas.microsoft.com/office/drawing/2014/main" id="{6BD0AF4F-4158-FCF4-DC33-A64B519A03CC}"/>
+                </a:ext>
+              </a:extLst>
+            </p:cNvPr>
+            <p:cNvSpPr txBox="1"/>
+            <p:nvPr/>
+          </p:nvSpPr>
+          <p:spPr>
+            <a:xfrm>
+              <a:off x="508550" y="3825671"/>
+              <a:ext cx="2389196" cy="692497"/>
+            </a:xfrm>
+            <a:prstGeom prst="rect">
+              <a:avLst/>
+            </a:prstGeom>
+            <a:noFill/>
+          </p:spPr>
+          <p:txBody>
+            <a:bodyPr wrap="square" rtlCol="0">
+              <a:spAutoFit/>
+            </a:bodyPr>
+            <a:lstStyle/>
+            <a:p>
+              <a:r>
+                <a:rPr lang="en-US" altLang="ko-KR" sz="1300" dirty="0"/>
+                <a:t>IP</a:t>
+              </a:r>
+            </a:p>
+            <a:p>
+              <a:r>
+                <a:rPr lang="en-US" altLang="ko-KR" sz="1300" dirty="0"/>
+                <a:t>10.0.0.2 (</a:t>
+              </a:r>
+              <a:r>
+                <a:rPr lang="ko-KR" altLang="en-US" sz="1300" dirty="0"/>
+                <a:t>유선</a:t>
+              </a:r>
+              <a:r>
+                <a:rPr lang="en-US" altLang="ko-KR" sz="1300" dirty="0"/>
+                <a:t>) Ethernet</a:t>
+              </a:r>
+            </a:p>
+            <a:p>
+              <a:r>
+                <a:rPr lang="en-US" altLang="ko-KR" sz="1300" dirty="0"/>
+                <a:t>172.30.1.55 (</a:t>
+              </a:r>
+              <a:r>
+                <a:rPr lang="ko-KR" altLang="en-US" sz="1300" dirty="0"/>
+                <a:t>무선</a:t>
+              </a:r>
+              <a:r>
+                <a:rPr lang="en-US" altLang="ko-KR" sz="1300" dirty="0"/>
+                <a:t>)</a:t>
+              </a:r>
+            </a:p>
+          </p:txBody>
+        </p:sp>
+        <p:sp>
+          <p:nvSpPr>
+            <p:cNvPr id="23" name="TextBox 22">
+              <a:extLst>
+                <a:ext uri="{FF2B5EF4-FFF2-40B4-BE49-F238E27FC236}">
+                  <a16:creationId xmlns:a16="http://schemas.microsoft.com/office/drawing/2014/main" id="{00A57F11-60E7-C1D8-C7E2-E03DC0FB7A13}"/>
+                </a:ext>
+              </a:extLst>
+            </p:cNvPr>
+            <p:cNvSpPr txBox="1"/>
+            <p:nvPr/>
+          </p:nvSpPr>
+          <p:spPr>
+            <a:xfrm>
+              <a:off x="4901401" y="3825671"/>
+              <a:ext cx="2389196" cy="692497"/>
+            </a:xfrm>
+            <a:prstGeom prst="rect">
+              <a:avLst/>
+            </a:prstGeom>
+            <a:noFill/>
+          </p:spPr>
+          <p:txBody>
+            <a:bodyPr wrap="square" rtlCol="0">
+              <a:spAutoFit/>
+            </a:bodyPr>
+            <a:lstStyle/>
+            <a:p>
+              <a:r>
+                <a:rPr lang="en-US" altLang="ko-KR" sz="1300" dirty="0"/>
+                <a:t>IP</a:t>
+              </a:r>
+            </a:p>
+            <a:p>
+              <a:r>
+                <a:rPr lang="en-US" altLang="ko-KR" sz="1300" dirty="0"/>
+                <a:t>10.0.0.1 (</a:t>
+              </a:r>
+              <a:r>
+                <a:rPr lang="ko-KR" altLang="en-US" sz="1300" dirty="0"/>
+                <a:t>유선</a:t>
+              </a:r>
+              <a:r>
+                <a:rPr lang="en-US" altLang="ko-KR" sz="1300" dirty="0"/>
+                <a:t>) Ethernet</a:t>
+              </a:r>
+            </a:p>
+            <a:p>
+              <a:r>
+                <a:rPr lang="en-US" altLang="ko-KR" sz="1300" dirty="0"/>
+                <a:t>172.30.1.10 (</a:t>
+              </a:r>
+              <a:r>
+                <a:rPr lang="ko-KR" altLang="en-US" sz="1300" dirty="0"/>
+                <a:t>무선</a:t>
+              </a:r>
+              <a:r>
+                <a:rPr lang="en-US" altLang="ko-KR" sz="1300" dirty="0"/>
+                <a:t>)</a:t>
+              </a:r>
+            </a:p>
+          </p:txBody>
+        </p:sp>
+        <p:sp>
+          <p:nvSpPr>
+            <p:cNvPr id="24" name="TextBox 23">
+              <a:extLst>
+                <a:ext uri="{FF2B5EF4-FFF2-40B4-BE49-F238E27FC236}">
+                  <a16:creationId xmlns:a16="http://schemas.microsoft.com/office/drawing/2014/main" id="{36D3AF90-618A-40D6-B4EB-F3C3B5688B70}"/>
+                </a:ext>
+              </a:extLst>
+            </p:cNvPr>
+            <p:cNvSpPr txBox="1"/>
+            <p:nvPr/>
+          </p:nvSpPr>
+          <p:spPr>
+            <a:xfrm>
+              <a:off x="9297612" y="3825671"/>
+              <a:ext cx="2389196" cy="492443"/>
+            </a:xfrm>
+            <a:prstGeom prst="rect">
+              <a:avLst/>
+            </a:prstGeom>
+            <a:noFill/>
+          </p:spPr>
+          <p:txBody>
+            <a:bodyPr wrap="square" rtlCol="0">
+              <a:spAutoFit/>
+            </a:bodyPr>
+            <a:lstStyle/>
+            <a:p>
+              <a:r>
+                <a:rPr lang="en-US" altLang="ko-KR" sz="1300" dirty="0"/>
+                <a:t>IP</a:t>
+              </a:r>
+            </a:p>
+            <a:p>
+              <a:r>
+                <a:rPr lang="en-US" altLang="ko-KR" sz="1300" dirty="0"/>
+                <a:t>172.30.1.85 (</a:t>
+              </a:r>
+              <a:r>
+                <a:rPr lang="ko-KR" altLang="en-US" sz="1300" dirty="0"/>
+                <a:t>무선</a:t>
+              </a:r>
+              <a:r>
+                <a:rPr lang="en-US" altLang="ko-KR" sz="1300" dirty="0"/>
+                <a:t>)</a:t>
+              </a:r>
+            </a:p>
+          </p:txBody>
+        </p:sp>
+        <p:cxnSp>
+          <p:nvCxnSpPr>
+            <p:cNvPr id="28" name="직선 화살표 연결선 27">
+              <a:extLst>
+                <a:ext uri="{FF2B5EF4-FFF2-40B4-BE49-F238E27FC236}">
+                  <a16:creationId xmlns:a16="http://schemas.microsoft.com/office/drawing/2014/main" id="{3B720251-C464-4CD0-3539-7182C25B6BEB}"/>
+                </a:ext>
+              </a:extLst>
+            </p:cNvPr>
+            <p:cNvCxnSpPr>
+              <a:cxnSpLocks/>
+              <a:stCxn id="3" idx="0"/>
+            </p:cNvCxnSpPr>
+            <p:nvPr/>
+          </p:nvCxnSpPr>
+          <p:spPr>
+            <a:xfrm flipV="1">
+              <a:off x="1699789" y="2459865"/>
+              <a:ext cx="0" cy="593074"/>
+            </a:xfrm>
+            <a:prstGeom prst="straightConnector1">
+              <a:avLst/>
+            </a:prstGeom>
+            <a:ln w="38100">
+              <a:solidFill>
+                <a:schemeClr val="tx1"/>
+              </a:solidFill>
+              <a:tailEnd type="triangle"/>
+            </a:ln>
+          </p:spPr>
+          <p:style>
+            <a:lnRef idx="2">
+              <a:schemeClr val="accent1"/>
+            </a:lnRef>
+            <a:fillRef idx="0">
+              <a:schemeClr val="accent1"/>
+            </a:fillRef>
+            <a:effectRef idx="1">
+              <a:schemeClr val="accent1"/>
+            </a:effectRef>
+            <a:fontRef idx="minor">
               <a:schemeClr val="tx1"/>
-            </a:solidFill>
-            <a:tailEnd type="triangle"/>
-          </a:ln>
-        </p:spPr>
-        <p:style>
-          <a:lnRef idx="2">
-            <a:schemeClr val="accent1"/>
-          </a:lnRef>
-          <a:fillRef idx="0">
-            <a:schemeClr val="accent1"/>
-          </a:fillRef>
-          <a:effectRef idx="1">
-            <a:schemeClr val="accent1"/>
-          </a:effectRef>
-          <a:fontRef idx="minor">
-            <a:schemeClr val="tx1"/>
-          </a:fontRef>
-        </p:style>
-      </p:cxnSp>
-      <p:sp>
-        <p:nvSpPr>
-          <p:cNvPr id="37" name="TextBox 36">
-            <a:extLst>
-              <a:ext uri="{FF2B5EF4-FFF2-40B4-BE49-F238E27FC236}">
-                <a16:creationId xmlns:a16="http://schemas.microsoft.com/office/drawing/2014/main" id="{0A01A4EE-6282-8210-EA35-28DCE338E37C}"/>
-              </a:ext>
-            </a:extLst>
-          </p:cNvPr>
-          <p:cNvSpPr txBox="1"/>
-          <p:nvPr/>
-        </p:nvSpPr>
-        <p:spPr>
-          <a:xfrm>
-            <a:off x="817586" y="2016226"/>
-            <a:ext cx="1764404" cy="292388"/>
-          </a:xfrm>
-          <a:prstGeom prst="rect">
-            <a:avLst/>
-          </a:prstGeom>
-          <a:noFill/>
-        </p:spPr>
-        <p:txBody>
-          <a:bodyPr wrap="square" rtlCol="0">
-            <a:spAutoFit/>
-          </a:bodyPr>
-          <a:lstStyle/>
-          <a:p>
-            <a:r>
-              <a:rPr lang="en-US" altLang="ko-KR" sz="1300" dirty="0"/>
-              <a:t>SLAM </a:t>
-            </a:r>
-            <a:r>
-              <a:rPr lang="ko-KR" altLang="en-US" sz="1300" dirty="0"/>
-              <a:t>및 </a:t>
-            </a:r>
-            <a:r>
-              <a:rPr lang="en-US" altLang="ko-KR" sz="1300" dirty="0"/>
-              <a:t>Navigation</a:t>
-            </a:r>
-            <a:endParaRPr lang="ko-KR" altLang="en-US" sz="1300" dirty="0"/>
-          </a:p>
-        </p:txBody>
-      </p:sp>
-      <p:sp>
-        <p:nvSpPr>
-          <p:cNvPr id="38" name="TextBox 37">
-            <a:extLst>
-              <a:ext uri="{FF2B5EF4-FFF2-40B4-BE49-F238E27FC236}">
-                <a16:creationId xmlns:a16="http://schemas.microsoft.com/office/drawing/2014/main" id="{63357D6B-F7F6-B405-53F3-832CB4168183}"/>
-              </a:ext>
-            </a:extLst>
-          </p:cNvPr>
-          <p:cNvSpPr txBox="1"/>
-          <p:nvPr/>
-        </p:nvSpPr>
-        <p:spPr>
-          <a:xfrm>
-            <a:off x="5681567" y="2016226"/>
-            <a:ext cx="828863" cy="292388"/>
-          </a:xfrm>
-          <a:prstGeom prst="rect">
-            <a:avLst/>
-          </a:prstGeom>
-          <a:noFill/>
-        </p:spPr>
-        <p:txBody>
-          <a:bodyPr wrap="square" rtlCol="0">
-            <a:spAutoFit/>
-          </a:bodyPr>
-          <a:lstStyle/>
-          <a:p>
-            <a:r>
-              <a:rPr lang="en-US" altLang="ko-KR" sz="1300" dirty="0"/>
-              <a:t>Camera</a:t>
-            </a:r>
-            <a:endParaRPr lang="ko-KR" altLang="en-US" sz="1300" dirty="0"/>
-          </a:p>
-        </p:txBody>
-      </p:sp>
-      <p:sp>
-        <p:nvSpPr>
-          <p:cNvPr id="39" name="TextBox 38">
-            <a:extLst>
-              <a:ext uri="{FF2B5EF4-FFF2-40B4-BE49-F238E27FC236}">
-                <a16:creationId xmlns:a16="http://schemas.microsoft.com/office/drawing/2014/main" id="{9A177159-16C6-75D9-2496-D4322B20AC3D}"/>
-              </a:ext>
-            </a:extLst>
-          </p:cNvPr>
-          <p:cNvSpPr txBox="1"/>
-          <p:nvPr/>
-        </p:nvSpPr>
-        <p:spPr>
-          <a:xfrm>
-            <a:off x="10168524" y="2016226"/>
-            <a:ext cx="647372" cy="292388"/>
-          </a:xfrm>
-          <a:prstGeom prst="rect">
-            <a:avLst/>
-          </a:prstGeom>
-          <a:noFill/>
-        </p:spPr>
-        <p:txBody>
-          <a:bodyPr wrap="square" rtlCol="0">
-            <a:spAutoFit/>
-          </a:bodyPr>
-          <a:lstStyle/>
-          <a:p>
-            <a:r>
-              <a:rPr lang="en-US" altLang="ko-KR" sz="1300" dirty="0"/>
-              <a:t>Vision</a:t>
-            </a:r>
-            <a:endParaRPr lang="ko-KR" altLang="en-US" sz="1300" dirty="0"/>
-          </a:p>
-        </p:txBody>
-      </p:sp>
+            </a:fontRef>
+          </p:style>
+        </p:cxnSp>
+        <p:cxnSp>
+          <p:nvCxnSpPr>
+            <p:cNvPr id="31" name="직선 화살표 연결선 30">
+              <a:extLst>
+                <a:ext uri="{FF2B5EF4-FFF2-40B4-BE49-F238E27FC236}">
+                  <a16:creationId xmlns:a16="http://schemas.microsoft.com/office/drawing/2014/main" id="{8B744147-E548-242D-B8CE-161E5E7522E3}"/>
+                </a:ext>
+              </a:extLst>
+            </p:cNvPr>
+            <p:cNvCxnSpPr>
+              <a:cxnSpLocks/>
+              <a:stCxn id="8" idx="0"/>
+            </p:cNvCxnSpPr>
+            <p:nvPr/>
+          </p:nvCxnSpPr>
+          <p:spPr>
+            <a:xfrm flipV="1">
+              <a:off x="6096000" y="2459865"/>
+              <a:ext cx="0" cy="593074"/>
+            </a:xfrm>
+            <a:prstGeom prst="straightConnector1">
+              <a:avLst/>
+            </a:prstGeom>
+            <a:ln w="38100">
+              <a:solidFill>
+                <a:schemeClr val="tx1"/>
+              </a:solidFill>
+              <a:tailEnd type="triangle"/>
+            </a:ln>
+          </p:spPr>
+          <p:style>
+            <a:lnRef idx="2">
+              <a:schemeClr val="accent1"/>
+            </a:lnRef>
+            <a:fillRef idx="0">
+              <a:schemeClr val="accent1"/>
+            </a:fillRef>
+            <a:effectRef idx="1">
+              <a:schemeClr val="accent1"/>
+            </a:effectRef>
+            <a:fontRef idx="minor">
+              <a:schemeClr val="tx1"/>
+            </a:fontRef>
+          </p:style>
+        </p:cxnSp>
+        <p:cxnSp>
+          <p:nvCxnSpPr>
+            <p:cNvPr id="34" name="직선 화살표 연결선 33">
+              <a:extLst>
+                <a:ext uri="{FF2B5EF4-FFF2-40B4-BE49-F238E27FC236}">
+                  <a16:creationId xmlns:a16="http://schemas.microsoft.com/office/drawing/2014/main" id="{27AA610E-A92B-5365-85AC-207C396A21D4}"/>
+                </a:ext>
+              </a:extLst>
+            </p:cNvPr>
+            <p:cNvCxnSpPr>
+              <a:cxnSpLocks/>
+              <a:stCxn id="9" idx="0"/>
+            </p:cNvCxnSpPr>
+            <p:nvPr/>
+          </p:nvCxnSpPr>
+          <p:spPr>
+            <a:xfrm flipV="1">
+              <a:off x="10492211" y="2459865"/>
+              <a:ext cx="0" cy="593074"/>
+            </a:xfrm>
+            <a:prstGeom prst="straightConnector1">
+              <a:avLst/>
+            </a:prstGeom>
+            <a:ln w="38100">
+              <a:solidFill>
+                <a:schemeClr val="tx1"/>
+              </a:solidFill>
+              <a:tailEnd type="triangle"/>
+            </a:ln>
+          </p:spPr>
+          <p:style>
+            <a:lnRef idx="2">
+              <a:schemeClr val="accent1"/>
+            </a:lnRef>
+            <a:fillRef idx="0">
+              <a:schemeClr val="accent1"/>
+            </a:fillRef>
+            <a:effectRef idx="1">
+              <a:schemeClr val="accent1"/>
+            </a:effectRef>
+            <a:fontRef idx="minor">
+              <a:schemeClr val="tx1"/>
+            </a:fontRef>
+          </p:style>
+        </p:cxnSp>
+        <p:sp>
+          <p:nvSpPr>
+            <p:cNvPr id="37" name="TextBox 36">
+              <a:extLst>
+                <a:ext uri="{FF2B5EF4-FFF2-40B4-BE49-F238E27FC236}">
+                  <a16:creationId xmlns:a16="http://schemas.microsoft.com/office/drawing/2014/main" id="{0A01A4EE-6282-8210-EA35-28DCE338E37C}"/>
+                </a:ext>
+              </a:extLst>
+            </p:cNvPr>
+            <p:cNvSpPr txBox="1"/>
+            <p:nvPr/>
+          </p:nvSpPr>
+          <p:spPr>
+            <a:xfrm>
+              <a:off x="817586" y="2016226"/>
+              <a:ext cx="1764404" cy="292388"/>
+            </a:xfrm>
+            <a:prstGeom prst="rect">
+              <a:avLst/>
+            </a:prstGeom>
+            <a:noFill/>
+          </p:spPr>
+          <p:txBody>
+            <a:bodyPr wrap="square" rtlCol="0">
+              <a:spAutoFit/>
+            </a:bodyPr>
+            <a:lstStyle/>
+            <a:p>
+              <a:r>
+                <a:rPr lang="en-US" altLang="ko-KR" sz="1300" dirty="0"/>
+                <a:t>SLAM </a:t>
+              </a:r>
+              <a:r>
+                <a:rPr lang="ko-KR" altLang="en-US" sz="1300" dirty="0"/>
+                <a:t>및 </a:t>
+              </a:r>
+              <a:r>
+                <a:rPr lang="en-US" altLang="ko-KR" sz="1300" dirty="0"/>
+                <a:t>Navigation</a:t>
+              </a:r>
+              <a:endParaRPr lang="ko-KR" altLang="en-US" sz="1300" dirty="0"/>
+            </a:p>
+          </p:txBody>
+        </p:sp>
+        <p:sp>
+          <p:nvSpPr>
+            <p:cNvPr id="38" name="TextBox 37">
+              <a:extLst>
+                <a:ext uri="{FF2B5EF4-FFF2-40B4-BE49-F238E27FC236}">
+                  <a16:creationId xmlns:a16="http://schemas.microsoft.com/office/drawing/2014/main" id="{63357D6B-F7F6-B405-53F3-832CB4168183}"/>
+                </a:ext>
+              </a:extLst>
+            </p:cNvPr>
+            <p:cNvSpPr txBox="1"/>
+            <p:nvPr/>
+          </p:nvSpPr>
+          <p:spPr>
+            <a:xfrm>
+              <a:off x="5681567" y="2016226"/>
+              <a:ext cx="828863" cy="292388"/>
+            </a:xfrm>
+            <a:prstGeom prst="rect">
+              <a:avLst/>
+            </a:prstGeom>
+            <a:noFill/>
+          </p:spPr>
+          <p:txBody>
+            <a:bodyPr wrap="square" rtlCol="0">
+              <a:spAutoFit/>
+            </a:bodyPr>
+            <a:lstStyle/>
+            <a:p>
+              <a:r>
+                <a:rPr lang="en-US" altLang="ko-KR" sz="1300" dirty="0"/>
+                <a:t>Camera</a:t>
+              </a:r>
+              <a:endParaRPr lang="ko-KR" altLang="en-US" sz="1300" dirty="0"/>
+            </a:p>
+          </p:txBody>
+        </p:sp>
+        <p:sp>
+          <p:nvSpPr>
+            <p:cNvPr id="39" name="TextBox 38">
+              <a:extLst>
+                <a:ext uri="{FF2B5EF4-FFF2-40B4-BE49-F238E27FC236}">
+                  <a16:creationId xmlns:a16="http://schemas.microsoft.com/office/drawing/2014/main" id="{9A177159-16C6-75D9-2496-D4322B20AC3D}"/>
+                </a:ext>
+              </a:extLst>
+            </p:cNvPr>
+            <p:cNvSpPr txBox="1"/>
+            <p:nvPr/>
+          </p:nvSpPr>
+          <p:spPr>
+            <a:xfrm>
+              <a:off x="10168524" y="2016226"/>
+              <a:ext cx="647372" cy="292388"/>
+            </a:xfrm>
+            <a:prstGeom prst="rect">
+              <a:avLst/>
+            </a:prstGeom>
+            <a:noFill/>
+          </p:spPr>
+          <p:txBody>
+            <a:bodyPr wrap="square" rtlCol="0">
+              <a:spAutoFit/>
+            </a:bodyPr>
+            <a:lstStyle/>
+            <a:p>
+              <a:r>
+                <a:rPr lang="en-US" altLang="ko-KR" sz="1300" dirty="0"/>
+                <a:t>Vision</a:t>
+              </a:r>
+              <a:endParaRPr lang="ko-KR" altLang="en-US" sz="1300" dirty="0"/>
+            </a:p>
+          </p:txBody>
+        </p:sp>
+      </p:grpSp>
     </p:spTree>
     <p:extLst>
       <p:ext uri="{BB962C8B-B14F-4D97-AF65-F5344CB8AC3E}">
@@ -5459,549 +5481,6 @@
       </p:sp>
       <p:sp>
         <p:nvSpPr>
-          <p:cNvPr id="34" name="사각형: 둥근 모서리 33">
-            <a:extLst>
-              <a:ext uri="{FF2B5EF4-FFF2-40B4-BE49-F238E27FC236}">
-                <a16:creationId xmlns:a16="http://schemas.microsoft.com/office/drawing/2014/main" id="{36265840-17EA-F232-6D1F-199F798E2942}"/>
-              </a:ext>
-            </a:extLst>
-          </p:cNvPr>
-          <p:cNvSpPr/>
-          <p:nvPr/>
-        </p:nvSpPr>
-        <p:spPr>
-          <a:xfrm rot="10800000" flipV="1">
-            <a:off x="551304" y="1637578"/>
-            <a:ext cx="1635842" cy="603443"/>
-          </a:xfrm>
-          <a:prstGeom prst="roundRect">
-            <a:avLst/>
-          </a:prstGeom>
-          <a:noFill/>
-          <a:ln w="38100">
-            <a:solidFill>
-              <a:schemeClr val="accent4">
-                <a:lumMod val="60000"/>
-                <a:lumOff val="40000"/>
-              </a:schemeClr>
-            </a:solidFill>
-          </a:ln>
-        </p:spPr>
-        <p:style>
-          <a:lnRef idx="2">
-            <a:schemeClr val="accent1">
-              <a:shade val="15000"/>
-            </a:schemeClr>
-          </a:lnRef>
-          <a:fillRef idx="1">
-            <a:schemeClr val="accent1"/>
-          </a:fillRef>
-          <a:effectRef idx="0">
-            <a:schemeClr val="accent1"/>
-          </a:effectRef>
-          <a:fontRef idx="minor">
-            <a:schemeClr val="lt1"/>
-          </a:fontRef>
-        </p:style>
-        <p:txBody>
-          <a:bodyPr rtlCol="0" anchor="ctr"/>
-          <a:lstStyle/>
-          <a:p>
-            <a:pPr algn="ctr"/>
-            <a:r>
-              <a:rPr lang="en-US" altLang="ko-KR" dirty="0">
-                <a:solidFill>
-                  <a:schemeClr val="tx1"/>
-                </a:solidFill>
-              </a:rPr>
-              <a:t>Ros1_ws1/</a:t>
-            </a:r>
-            <a:r>
-              <a:rPr lang="en-US" altLang="ko-KR" dirty="0" err="1">
-                <a:solidFill>
-                  <a:schemeClr val="tx1"/>
-                </a:solidFill>
-              </a:rPr>
-              <a:t>src</a:t>
-            </a:r>
-            <a:endParaRPr lang="ko-KR" altLang="en-US" dirty="0">
-              <a:solidFill>
-                <a:schemeClr val="tx1"/>
-              </a:solidFill>
-            </a:endParaRPr>
-          </a:p>
-        </p:txBody>
-      </p:sp>
-      <p:sp>
-        <p:nvSpPr>
-          <p:cNvPr id="35" name="사각형: 둥근 모서리 34">
-            <a:extLst>
-              <a:ext uri="{FF2B5EF4-FFF2-40B4-BE49-F238E27FC236}">
-                <a16:creationId xmlns:a16="http://schemas.microsoft.com/office/drawing/2014/main" id="{E54AE13D-52DC-40B4-DBA8-8760011D3D7A}"/>
-              </a:ext>
-            </a:extLst>
-          </p:cNvPr>
-          <p:cNvSpPr/>
-          <p:nvPr/>
-        </p:nvSpPr>
-        <p:spPr>
-          <a:xfrm rot="10800000" flipV="1">
-            <a:off x="1292075" y="2618912"/>
-            <a:ext cx="1481542" cy="603443"/>
-          </a:xfrm>
-          <a:prstGeom prst="roundRect">
-            <a:avLst/>
-          </a:prstGeom>
-          <a:noFill/>
-          <a:ln w="38100">
-            <a:solidFill>
-              <a:schemeClr val="accent4">
-                <a:lumMod val="60000"/>
-                <a:lumOff val="40000"/>
-              </a:schemeClr>
-            </a:solidFill>
-          </a:ln>
-        </p:spPr>
-        <p:style>
-          <a:lnRef idx="2">
-            <a:schemeClr val="accent1">
-              <a:shade val="15000"/>
-            </a:schemeClr>
-          </a:lnRef>
-          <a:fillRef idx="1">
-            <a:schemeClr val="accent1"/>
-          </a:fillRef>
-          <a:effectRef idx="0">
-            <a:schemeClr val="accent1"/>
-          </a:effectRef>
-          <a:fontRef idx="minor">
-            <a:schemeClr val="lt1"/>
-          </a:fontRef>
-        </p:style>
-        <p:txBody>
-          <a:bodyPr rtlCol="0" anchor="ctr"/>
-          <a:lstStyle/>
-          <a:p>
-            <a:pPr algn="ctr"/>
-            <a:r>
-              <a:rPr lang="en-US" altLang="ko-KR" sz="1200" dirty="0" err="1">
-                <a:solidFill>
-                  <a:schemeClr val="tx1"/>
-                </a:solidFill>
-              </a:rPr>
-              <a:t>myagv_bringup</a:t>
-            </a:r>
-            <a:r>
-              <a:rPr lang="en-US" altLang="ko-KR" sz="1200" dirty="0">
-                <a:solidFill>
-                  <a:schemeClr val="tx1"/>
-                </a:solidFill>
-              </a:rPr>
-              <a:t>/</a:t>
-            </a:r>
-            <a:endParaRPr lang="ko-KR" altLang="en-US" sz="1200" dirty="0">
-              <a:solidFill>
-                <a:schemeClr val="tx1"/>
-              </a:solidFill>
-            </a:endParaRPr>
-          </a:p>
-        </p:txBody>
-      </p:sp>
-      <p:sp>
-        <p:nvSpPr>
-          <p:cNvPr id="36" name="사각형: 둥근 모서리 35">
-            <a:extLst>
-              <a:ext uri="{FF2B5EF4-FFF2-40B4-BE49-F238E27FC236}">
-                <a16:creationId xmlns:a16="http://schemas.microsoft.com/office/drawing/2014/main" id="{C13854B1-BBB8-7944-72F9-7C75136AEDB4}"/>
-              </a:ext>
-            </a:extLst>
-          </p:cNvPr>
-          <p:cNvSpPr/>
-          <p:nvPr/>
-        </p:nvSpPr>
-        <p:spPr>
-          <a:xfrm rot="10800000" flipV="1">
-            <a:off x="1292075" y="3417661"/>
-            <a:ext cx="1481542" cy="603443"/>
-          </a:xfrm>
-          <a:prstGeom prst="roundRect">
-            <a:avLst/>
-          </a:prstGeom>
-          <a:noFill/>
-          <a:ln w="38100">
-            <a:solidFill>
-              <a:schemeClr val="accent4">
-                <a:lumMod val="60000"/>
-                <a:lumOff val="40000"/>
-              </a:schemeClr>
-            </a:solidFill>
-          </a:ln>
-        </p:spPr>
-        <p:style>
-          <a:lnRef idx="2">
-            <a:schemeClr val="accent1">
-              <a:shade val="15000"/>
-            </a:schemeClr>
-          </a:lnRef>
-          <a:fillRef idx="1">
-            <a:schemeClr val="accent1"/>
-          </a:fillRef>
-          <a:effectRef idx="0">
-            <a:schemeClr val="accent1"/>
-          </a:effectRef>
-          <a:fontRef idx="minor">
-            <a:schemeClr val="lt1"/>
-          </a:fontRef>
-        </p:style>
-        <p:txBody>
-          <a:bodyPr rtlCol="0" anchor="ctr"/>
-          <a:lstStyle/>
-          <a:p>
-            <a:pPr algn="ctr"/>
-            <a:r>
-              <a:rPr lang="en-US" altLang="ko-KR" sz="1200" dirty="0" err="1">
-                <a:solidFill>
-                  <a:schemeClr val="tx1"/>
-                </a:solidFill>
-              </a:rPr>
-              <a:t>myagv_control</a:t>
-            </a:r>
-            <a:r>
-              <a:rPr lang="en-US" altLang="ko-KR" sz="1200" dirty="0">
-                <a:solidFill>
-                  <a:schemeClr val="tx1"/>
-                </a:solidFill>
-              </a:rPr>
-              <a:t>/</a:t>
-            </a:r>
-            <a:endParaRPr lang="ko-KR" altLang="en-US" sz="1200" dirty="0">
-              <a:solidFill>
-                <a:schemeClr val="tx1"/>
-              </a:solidFill>
-            </a:endParaRPr>
-          </a:p>
-        </p:txBody>
-      </p:sp>
-      <p:sp>
-        <p:nvSpPr>
-          <p:cNvPr id="37" name="사각형: 둥근 모서리 36">
-            <a:extLst>
-              <a:ext uri="{FF2B5EF4-FFF2-40B4-BE49-F238E27FC236}">
-                <a16:creationId xmlns:a16="http://schemas.microsoft.com/office/drawing/2014/main" id="{13FE3FFF-8014-9119-F1F6-45D36264C027}"/>
-              </a:ext>
-            </a:extLst>
-          </p:cNvPr>
-          <p:cNvSpPr/>
-          <p:nvPr/>
-        </p:nvSpPr>
-        <p:spPr>
-          <a:xfrm rot="10800000" flipV="1">
-            <a:off x="1292075" y="5064701"/>
-            <a:ext cx="1481542" cy="603443"/>
-          </a:xfrm>
-          <a:prstGeom prst="roundRect">
-            <a:avLst/>
-          </a:prstGeom>
-          <a:noFill/>
-          <a:ln w="38100">
-            <a:solidFill>
-              <a:schemeClr val="accent4">
-                <a:lumMod val="60000"/>
-                <a:lumOff val="40000"/>
-              </a:schemeClr>
-            </a:solidFill>
-          </a:ln>
-        </p:spPr>
-        <p:style>
-          <a:lnRef idx="2">
-            <a:schemeClr val="accent1">
-              <a:shade val="15000"/>
-            </a:schemeClr>
-          </a:lnRef>
-          <a:fillRef idx="1">
-            <a:schemeClr val="accent1"/>
-          </a:fillRef>
-          <a:effectRef idx="0">
-            <a:schemeClr val="accent1"/>
-          </a:effectRef>
-          <a:fontRef idx="minor">
-            <a:schemeClr val="lt1"/>
-          </a:fontRef>
-        </p:style>
-        <p:txBody>
-          <a:bodyPr rtlCol="0" anchor="ctr"/>
-          <a:lstStyle/>
-          <a:p>
-            <a:pPr algn="ctr"/>
-            <a:r>
-              <a:rPr lang="en-US" altLang="ko-KR" sz="1200" dirty="0" err="1">
-                <a:solidFill>
-                  <a:schemeClr val="tx1"/>
-                </a:solidFill>
-              </a:rPr>
-              <a:t>myagv_sensor</a:t>
-            </a:r>
-            <a:r>
-              <a:rPr lang="en-US" altLang="ko-KR" sz="1200" dirty="0">
-                <a:solidFill>
-                  <a:schemeClr val="tx1"/>
-                </a:solidFill>
-              </a:rPr>
-              <a:t>/</a:t>
-            </a:r>
-            <a:endParaRPr lang="ko-KR" altLang="en-US" sz="1200" dirty="0">
-              <a:solidFill>
-                <a:schemeClr val="tx1"/>
-              </a:solidFill>
-            </a:endParaRPr>
-          </a:p>
-        </p:txBody>
-      </p:sp>
-      <p:sp>
-        <p:nvSpPr>
-          <p:cNvPr id="38" name="사각형: 둥근 모서리 37">
-            <a:extLst>
-              <a:ext uri="{FF2B5EF4-FFF2-40B4-BE49-F238E27FC236}">
-                <a16:creationId xmlns:a16="http://schemas.microsoft.com/office/drawing/2014/main" id="{C930F89E-0876-0BDF-E825-946293DB1446}"/>
-              </a:ext>
-            </a:extLst>
-          </p:cNvPr>
-          <p:cNvSpPr/>
-          <p:nvPr/>
-        </p:nvSpPr>
-        <p:spPr>
-          <a:xfrm rot="10800000" flipV="1">
-            <a:off x="1292073" y="5938449"/>
-            <a:ext cx="1481542" cy="603443"/>
-          </a:xfrm>
-          <a:prstGeom prst="roundRect">
-            <a:avLst/>
-          </a:prstGeom>
-          <a:noFill/>
-          <a:ln w="38100">
-            <a:solidFill>
-              <a:schemeClr val="accent4">
-                <a:lumMod val="60000"/>
-                <a:lumOff val="40000"/>
-              </a:schemeClr>
-            </a:solidFill>
-          </a:ln>
-        </p:spPr>
-        <p:style>
-          <a:lnRef idx="2">
-            <a:schemeClr val="accent1">
-              <a:shade val="15000"/>
-            </a:schemeClr>
-          </a:lnRef>
-          <a:fillRef idx="1">
-            <a:schemeClr val="accent1"/>
-          </a:fillRef>
-          <a:effectRef idx="0">
-            <a:schemeClr val="accent1"/>
-          </a:effectRef>
-          <a:fontRef idx="minor">
-            <a:schemeClr val="lt1"/>
-          </a:fontRef>
-        </p:style>
-        <p:txBody>
-          <a:bodyPr rtlCol="0" anchor="ctr"/>
-          <a:lstStyle/>
-          <a:p>
-            <a:pPr algn="ctr"/>
-            <a:r>
-              <a:rPr lang="en-US" altLang="ko-KR" sz="1200" dirty="0" err="1">
-                <a:solidFill>
-                  <a:schemeClr val="tx1"/>
-                </a:solidFill>
-              </a:rPr>
-              <a:t>myagv_teleop</a:t>
-            </a:r>
-            <a:r>
-              <a:rPr lang="en-US" altLang="ko-KR" sz="1200" dirty="0">
-                <a:solidFill>
-                  <a:schemeClr val="tx1"/>
-                </a:solidFill>
-              </a:rPr>
-              <a:t>/</a:t>
-            </a:r>
-            <a:endParaRPr lang="ko-KR" altLang="en-US" sz="1200" dirty="0">
-              <a:solidFill>
-                <a:schemeClr val="tx1"/>
-              </a:solidFill>
-            </a:endParaRPr>
-          </a:p>
-        </p:txBody>
-      </p:sp>
-      <p:cxnSp>
-        <p:nvCxnSpPr>
-          <p:cNvPr id="43" name="연결선: 꺾임 42">
-            <a:extLst>
-              <a:ext uri="{FF2B5EF4-FFF2-40B4-BE49-F238E27FC236}">
-                <a16:creationId xmlns:a16="http://schemas.microsoft.com/office/drawing/2014/main" id="{58A11589-B740-A8CA-8B9F-2A896B977A38}"/>
-              </a:ext>
-            </a:extLst>
-          </p:cNvPr>
-          <p:cNvCxnSpPr>
-            <a:cxnSpLocks/>
-            <a:endCxn id="35" idx="3"/>
-          </p:cNvCxnSpPr>
-          <p:nvPr/>
-        </p:nvCxnSpPr>
-        <p:spPr>
-          <a:xfrm rot="16200000" flipH="1">
-            <a:off x="689291" y="2317849"/>
-            <a:ext cx="679613" cy="525956"/>
-          </a:xfrm>
-          <a:prstGeom prst="bentConnector2">
-            <a:avLst/>
-          </a:prstGeom>
-          <a:ln>
-            <a:tailEnd type="triangle"/>
-          </a:ln>
-        </p:spPr>
-        <p:style>
-          <a:lnRef idx="2">
-            <a:schemeClr val="accent1"/>
-          </a:lnRef>
-          <a:fillRef idx="0">
-            <a:schemeClr val="accent1"/>
-          </a:fillRef>
-          <a:effectRef idx="1">
-            <a:schemeClr val="accent1"/>
-          </a:effectRef>
-          <a:fontRef idx="minor">
-            <a:schemeClr val="tx1"/>
-          </a:fontRef>
-        </p:style>
-      </p:cxnSp>
-      <p:cxnSp>
-        <p:nvCxnSpPr>
-          <p:cNvPr id="46" name="연결선: 꺾임 45">
-            <a:extLst>
-              <a:ext uri="{FF2B5EF4-FFF2-40B4-BE49-F238E27FC236}">
-                <a16:creationId xmlns:a16="http://schemas.microsoft.com/office/drawing/2014/main" id="{B790FDA7-5F8F-3E9D-E890-96054E002B7C}"/>
-              </a:ext>
-            </a:extLst>
-          </p:cNvPr>
-          <p:cNvCxnSpPr>
-            <a:cxnSpLocks/>
-            <a:endCxn id="36" idx="3"/>
-          </p:cNvCxnSpPr>
-          <p:nvPr/>
-        </p:nvCxnSpPr>
-        <p:spPr>
-          <a:xfrm rot="16200000" flipH="1">
-            <a:off x="307643" y="2734950"/>
-            <a:ext cx="1442901" cy="525963"/>
-          </a:xfrm>
-          <a:prstGeom prst="bentConnector2">
-            <a:avLst/>
-          </a:prstGeom>
-          <a:ln>
-            <a:tailEnd type="triangle"/>
-          </a:ln>
-        </p:spPr>
-        <p:style>
-          <a:lnRef idx="2">
-            <a:schemeClr val="accent1"/>
-          </a:lnRef>
-          <a:fillRef idx="0">
-            <a:schemeClr val="accent1"/>
-          </a:fillRef>
-          <a:effectRef idx="1">
-            <a:schemeClr val="accent1"/>
-          </a:effectRef>
-          <a:fontRef idx="minor">
-            <a:schemeClr val="tx1"/>
-          </a:fontRef>
-        </p:style>
-      </p:cxnSp>
-      <p:cxnSp>
-        <p:nvCxnSpPr>
-          <p:cNvPr id="47" name="연결선: 꺾임 46">
-            <a:extLst>
-              <a:ext uri="{FF2B5EF4-FFF2-40B4-BE49-F238E27FC236}">
-                <a16:creationId xmlns:a16="http://schemas.microsoft.com/office/drawing/2014/main" id="{CCF9CA41-0D2C-CC2D-7B29-859A59ED8812}"/>
-              </a:ext>
-            </a:extLst>
-          </p:cNvPr>
-          <p:cNvCxnSpPr>
-            <a:cxnSpLocks/>
-            <a:endCxn id="37" idx="3"/>
-          </p:cNvCxnSpPr>
-          <p:nvPr/>
-        </p:nvCxnSpPr>
-        <p:spPr>
-          <a:xfrm rot="16200000" flipH="1">
-            <a:off x="-110946" y="3963402"/>
-            <a:ext cx="2280084" cy="525958"/>
-          </a:xfrm>
-          <a:prstGeom prst="bentConnector2">
-            <a:avLst/>
-          </a:prstGeom>
-          <a:ln>
-            <a:tailEnd type="triangle"/>
-          </a:ln>
-        </p:spPr>
-        <p:style>
-          <a:lnRef idx="2">
-            <a:schemeClr val="accent1"/>
-          </a:lnRef>
-          <a:fillRef idx="0">
-            <a:schemeClr val="accent1"/>
-          </a:fillRef>
-          <a:effectRef idx="1">
-            <a:schemeClr val="accent1"/>
-          </a:effectRef>
-          <a:fontRef idx="minor">
-            <a:schemeClr val="tx1"/>
-          </a:fontRef>
-        </p:style>
-      </p:cxnSp>
-      <p:cxnSp>
-        <p:nvCxnSpPr>
-          <p:cNvPr id="48" name="연결선: 꺾임 47">
-            <a:extLst>
-              <a:ext uri="{FF2B5EF4-FFF2-40B4-BE49-F238E27FC236}">
-                <a16:creationId xmlns:a16="http://schemas.microsoft.com/office/drawing/2014/main" id="{5D1BBBB6-C7C9-CDF6-8EB9-1C1D7CA7A960}"/>
-              </a:ext>
-            </a:extLst>
-          </p:cNvPr>
-          <p:cNvCxnSpPr>
-            <a:cxnSpLocks/>
-            <a:endCxn id="38" idx="3"/>
-          </p:cNvCxnSpPr>
-          <p:nvPr/>
-        </p:nvCxnSpPr>
-        <p:spPr>
-          <a:xfrm rot="16200000" flipH="1">
-            <a:off x="-530092" y="4418006"/>
-            <a:ext cx="3118372" cy="525958"/>
-          </a:xfrm>
-          <a:prstGeom prst="bentConnector2">
-            <a:avLst/>
-          </a:prstGeom>
-          <a:ln>
-            <a:tailEnd type="triangle"/>
-          </a:ln>
-        </p:spPr>
-        <p:style>
-          <a:lnRef idx="2">
-            <a:schemeClr val="accent1"/>
-          </a:lnRef>
-          <a:fillRef idx="0">
-            <a:schemeClr val="accent1"/>
-          </a:fillRef>
-          <a:effectRef idx="1">
-            <a:schemeClr val="accent1"/>
-          </a:effectRef>
-          <a:fontRef idx="minor">
-            <a:schemeClr val="tx1"/>
-          </a:fontRef>
-        </p:style>
-      </p:cxnSp>
-      <p:sp>
-        <p:nvSpPr>
           <p:cNvPr id="59" name="TextBox 58">
             <a:extLst>
               <a:ext uri="{FF2B5EF4-FFF2-40B4-BE49-F238E27FC236}">
@@ -6465,123 +5944,687 @@
           </a:p>
         </p:txBody>
       </p:sp>
-      <p:sp>
-        <p:nvSpPr>
-          <p:cNvPr id="3" name="사각형: 둥근 모서리 2">
-            <a:extLst>
-              <a:ext uri="{FF2B5EF4-FFF2-40B4-BE49-F238E27FC236}">
-                <a16:creationId xmlns:a16="http://schemas.microsoft.com/office/drawing/2014/main" id="{517E7824-2703-223B-7232-7862967DB9E6}"/>
-              </a:ext>
-            </a:extLst>
-          </p:cNvPr>
-          <p:cNvSpPr/>
+      <p:grpSp>
+        <p:nvGrpSpPr>
+          <p:cNvPr id="2" name="그룹 1">
+            <a:extLst>
+              <a:ext uri="{FF2B5EF4-FFF2-40B4-BE49-F238E27FC236}">
+                <a16:creationId xmlns:a16="http://schemas.microsoft.com/office/drawing/2014/main" id="{E791D65D-6C5F-4CA8-ACA3-710CFFA55602}"/>
+              </a:ext>
+            </a:extLst>
+          </p:cNvPr>
+          <p:cNvGrpSpPr/>
           <p:nvPr/>
-        </p:nvSpPr>
-        <p:spPr>
-          <a:xfrm rot="10800000" flipV="1">
-            <a:off x="1291719" y="4232011"/>
-            <a:ext cx="1481542" cy="603443"/>
+        </p:nvGrpSpPr>
+        <p:grpSpPr>
+          <a:xfrm>
+            <a:off x="551304" y="1637578"/>
+            <a:ext cx="2222313" cy="4904314"/>
+            <a:chOff x="551304" y="1637578"/>
+            <a:chExt cx="2222313" cy="4904314"/>
           </a:xfrm>
-          <a:prstGeom prst="roundRect">
-            <a:avLst/>
-          </a:prstGeom>
-          <a:noFill/>
-          <a:ln w="38100">
-            <a:solidFill>
-              <a:schemeClr val="accent4">
-                <a:lumMod val="60000"/>
-                <a:lumOff val="40000"/>
+        </p:grpSpPr>
+        <p:sp>
+          <p:nvSpPr>
+            <p:cNvPr id="34" name="사각형: 둥근 모서리 33">
+              <a:extLst>
+                <a:ext uri="{FF2B5EF4-FFF2-40B4-BE49-F238E27FC236}">
+                  <a16:creationId xmlns:a16="http://schemas.microsoft.com/office/drawing/2014/main" id="{36265840-17EA-F232-6D1F-199F798E2942}"/>
+                </a:ext>
+              </a:extLst>
+            </p:cNvPr>
+            <p:cNvSpPr/>
+            <p:nvPr/>
+          </p:nvSpPr>
+          <p:spPr>
+            <a:xfrm rot="10800000" flipV="1">
+              <a:off x="551304" y="1637578"/>
+              <a:ext cx="1635842" cy="603443"/>
+            </a:xfrm>
+            <a:prstGeom prst="roundRect">
+              <a:avLst/>
+            </a:prstGeom>
+            <a:noFill/>
+            <a:ln w="38100">
+              <a:solidFill>
+                <a:schemeClr val="accent4">
+                  <a:lumMod val="60000"/>
+                  <a:lumOff val="40000"/>
+                </a:schemeClr>
+              </a:solidFill>
+            </a:ln>
+          </p:spPr>
+          <p:style>
+            <a:lnRef idx="2">
+              <a:schemeClr val="accent1">
+                <a:shade val="15000"/>
               </a:schemeClr>
-            </a:solidFill>
-          </a:ln>
-        </p:spPr>
-        <p:style>
-          <a:lnRef idx="2">
-            <a:schemeClr val="accent1">
-              <a:shade val="15000"/>
-            </a:schemeClr>
-          </a:lnRef>
-          <a:fillRef idx="1">
-            <a:schemeClr val="accent1"/>
-          </a:fillRef>
-          <a:effectRef idx="0">
-            <a:schemeClr val="accent1"/>
-          </a:effectRef>
-          <a:fontRef idx="minor">
-            <a:schemeClr val="lt1"/>
-          </a:fontRef>
-        </p:style>
-        <p:txBody>
-          <a:bodyPr rtlCol="0" anchor="ctr"/>
-          <a:lstStyle/>
-          <a:p>
-            <a:pPr algn="ctr"/>
-            <a:r>
-              <a:rPr lang="en-US" altLang="ko-KR" sz="1100" dirty="0" err="1">
+            </a:lnRef>
+            <a:fillRef idx="1">
+              <a:schemeClr val="accent1"/>
+            </a:fillRef>
+            <a:effectRef idx="0">
+              <a:schemeClr val="accent1"/>
+            </a:effectRef>
+            <a:fontRef idx="minor">
+              <a:schemeClr val="lt1"/>
+            </a:fontRef>
+          </p:style>
+          <p:txBody>
+            <a:bodyPr rtlCol="0" anchor="ctr"/>
+            <a:lstStyle/>
+            <a:p>
+              <a:pPr algn="ctr"/>
+              <a:r>
+                <a:rPr lang="en-US" altLang="ko-KR" dirty="0">
+                  <a:solidFill>
+                    <a:schemeClr val="tx1"/>
+                  </a:solidFill>
+                </a:rPr>
+                <a:t>Ros1_ws1/</a:t>
+              </a:r>
+              <a:r>
+                <a:rPr lang="en-US" altLang="ko-KR" dirty="0" err="1">
+                  <a:solidFill>
+                    <a:schemeClr val="tx1"/>
+                  </a:solidFill>
+                </a:rPr>
+                <a:t>src</a:t>
+              </a:r>
+              <a:endParaRPr lang="ko-KR" altLang="en-US" dirty="0">
                 <a:solidFill>
                   <a:schemeClr val="tx1"/>
                 </a:solidFill>
-              </a:rPr>
-              <a:t>myagv_vision_sub</a:t>
-            </a:r>
-            <a:r>
-              <a:rPr lang="en-US" altLang="ko-KR" sz="1100" dirty="0">
+              </a:endParaRPr>
+            </a:p>
+          </p:txBody>
+        </p:sp>
+        <p:sp>
+          <p:nvSpPr>
+            <p:cNvPr id="35" name="사각형: 둥근 모서리 34">
+              <a:extLst>
+                <a:ext uri="{FF2B5EF4-FFF2-40B4-BE49-F238E27FC236}">
+                  <a16:creationId xmlns:a16="http://schemas.microsoft.com/office/drawing/2014/main" id="{E54AE13D-52DC-40B4-DBA8-8760011D3D7A}"/>
+                </a:ext>
+              </a:extLst>
+            </p:cNvPr>
+            <p:cNvSpPr/>
+            <p:nvPr/>
+          </p:nvSpPr>
+          <p:spPr>
+            <a:xfrm rot="10800000" flipV="1">
+              <a:off x="1292075" y="2618912"/>
+              <a:ext cx="1481542" cy="603443"/>
+            </a:xfrm>
+            <a:prstGeom prst="roundRect">
+              <a:avLst/>
+            </a:prstGeom>
+            <a:noFill/>
+            <a:ln w="38100">
+              <a:solidFill>
+                <a:schemeClr val="accent4">
+                  <a:lumMod val="60000"/>
+                  <a:lumOff val="40000"/>
+                </a:schemeClr>
+              </a:solidFill>
+            </a:ln>
+          </p:spPr>
+          <p:style>
+            <a:lnRef idx="2">
+              <a:schemeClr val="accent1">
+                <a:shade val="15000"/>
+              </a:schemeClr>
+            </a:lnRef>
+            <a:fillRef idx="1">
+              <a:schemeClr val="accent1"/>
+            </a:fillRef>
+            <a:effectRef idx="0">
+              <a:schemeClr val="accent1"/>
+            </a:effectRef>
+            <a:fontRef idx="minor">
+              <a:schemeClr val="lt1"/>
+            </a:fontRef>
+          </p:style>
+          <p:txBody>
+            <a:bodyPr rtlCol="0" anchor="ctr"/>
+            <a:lstStyle/>
+            <a:p>
+              <a:pPr algn="ctr"/>
+              <a:r>
+                <a:rPr lang="en-US" altLang="ko-KR" sz="1200" dirty="0" err="1">
+                  <a:solidFill>
+                    <a:schemeClr val="tx1"/>
+                  </a:solidFill>
+                </a:rPr>
+                <a:t>myagv_bringup</a:t>
+              </a:r>
+              <a:r>
+                <a:rPr lang="en-US" altLang="ko-KR" sz="1200" dirty="0">
+                  <a:solidFill>
+                    <a:schemeClr val="tx1"/>
+                  </a:solidFill>
+                </a:rPr>
+                <a:t>/</a:t>
+              </a:r>
+              <a:endParaRPr lang="ko-KR" altLang="en-US" sz="1200" dirty="0">
                 <a:solidFill>
                   <a:schemeClr val="tx1"/>
                 </a:solidFill>
-              </a:rPr>
-              <a:t>/</a:t>
-            </a:r>
-            <a:endParaRPr lang="ko-KR" altLang="en-US" sz="1100" dirty="0">
+              </a:endParaRPr>
+            </a:p>
+          </p:txBody>
+        </p:sp>
+        <p:sp>
+          <p:nvSpPr>
+            <p:cNvPr id="36" name="사각형: 둥근 모서리 35">
+              <a:extLst>
+                <a:ext uri="{FF2B5EF4-FFF2-40B4-BE49-F238E27FC236}">
+                  <a16:creationId xmlns:a16="http://schemas.microsoft.com/office/drawing/2014/main" id="{C13854B1-BBB8-7944-72F9-7C75136AEDB4}"/>
+                </a:ext>
+              </a:extLst>
+            </p:cNvPr>
+            <p:cNvSpPr/>
+            <p:nvPr/>
+          </p:nvSpPr>
+          <p:spPr>
+            <a:xfrm rot="10800000" flipV="1">
+              <a:off x="1292075" y="3417661"/>
+              <a:ext cx="1481542" cy="603443"/>
+            </a:xfrm>
+            <a:prstGeom prst="roundRect">
+              <a:avLst/>
+            </a:prstGeom>
+            <a:noFill/>
+            <a:ln w="38100">
               <a:solidFill>
-                <a:schemeClr val="tx1"/>
+                <a:schemeClr val="accent4">
+                  <a:lumMod val="60000"/>
+                  <a:lumOff val="40000"/>
+                </a:schemeClr>
               </a:solidFill>
-            </a:endParaRPr>
-          </a:p>
-        </p:txBody>
-      </p:sp>
-      <p:cxnSp>
-        <p:nvCxnSpPr>
-          <p:cNvPr id="5" name="연결선: 꺾임 4">
-            <a:extLst>
-              <a:ext uri="{FF2B5EF4-FFF2-40B4-BE49-F238E27FC236}">
-                <a16:creationId xmlns:a16="http://schemas.microsoft.com/office/drawing/2014/main" id="{0C0E52A9-7DDA-6175-37CD-4A55F1012CB5}"/>
-              </a:ext>
-            </a:extLst>
-          </p:cNvPr>
-          <p:cNvCxnSpPr>
-            <a:cxnSpLocks/>
-            <a:endCxn id="3" idx="3"/>
-          </p:cNvCxnSpPr>
-          <p:nvPr/>
-        </p:nvCxnSpPr>
-        <p:spPr>
-          <a:xfrm rot="16200000" flipH="1">
-            <a:off x="-111302" y="3130712"/>
-            <a:ext cx="2280084" cy="525958"/>
-          </a:xfrm>
-          <a:prstGeom prst="bentConnector2">
-            <a:avLst/>
-          </a:prstGeom>
-          <a:ln>
-            <a:tailEnd type="triangle"/>
-          </a:ln>
-        </p:spPr>
-        <p:style>
-          <a:lnRef idx="2">
-            <a:schemeClr val="accent1"/>
-          </a:lnRef>
-          <a:fillRef idx="0">
-            <a:schemeClr val="accent1"/>
-          </a:fillRef>
-          <a:effectRef idx="1">
-            <a:schemeClr val="accent1"/>
-          </a:effectRef>
-          <a:fontRef idx="minor">
-            <a:schemeClr val="tx1"/>
-          </a:fontRef>
-        </p:style>
-      </p:cxnSp>
+            </a:ln>
+          </p:spPr>
+          <p:style>
+            <a:lnRef idx="2">
+              <a:schemeClr val="accent1">
+                <a:shade val="15000"/>
+              </a:schemeClr>
+            </a:lnRef>
+            <a:fillRef idx="1">
+              <a:schemeClr val="accent1"/>
+            </a:fillRef>
+            <a:effectRef idx="0">
+              <a:schemeClr val="accent1"/>
+            </a:effectRef>
+            <a:fontRef idx="minor">
+              <a:schemeClr val="lt1"/>
+            </a:fontRef>
+          </p:style>
+          <p:txBody>
+            <a:bodyPr rtlCol="0" anchor="ctr"/>
+            <a:lstStyle/>
+            <a:p>
+              <a:pPr algn="ctr"/>
+              <a:r>
+                <a:rPr lang="en-US" altLang="ko-KR" sz="1200" dirty="0" err="1">
+                  <a:solidFill>
+                    <a:schemeClr val="tx1"/>
+                  </a:solidFill>
+                </a:rPr>
+                <a:t>myagv_control</a:t>
+              </a:r>
+              <a:r>
+                <a:rPr lang="en-US" altLang="ko-KR" sz="1200" dirty="0">
+                  <a:solidFill>
+                    <a:schemeClr val="tx1"/>
+                  </a:solidFill>
+                </a:rPr>
+                <a:t>/</a:t>
+              </a:r>
+              <a:endParaRPr lang="ko-KR" altLang="en-US" sz="1200" dirty="0">
+                <a:solidFill>
+                  <a:schemeClr val="tx1"/>
+                </a:solidFill>
+              </a:endParaRPr>
+            </a:p>
+          </p:txBody>
+        </p:sp>
+        <p:sp>
+          <p:nvSpPr>
+            <p:cNvPr id="37" name="사각형: 둥근 모서리 36">
+              <a:extLst>
+                <a:ext uri="{FF2B5EF4-FFF2-40B4-BE49-F238E27FC236}">
+                  <a16:creationId xmlns:a16="http://schemas.microsoft.com/office/drawing/2014/main" id="{13FE3FFF-8014-9119-F1F6-45D36264C027}"/>
+                </a:ext>
+              </a:extLst>
+            </p:cNvPr>
+            <p:cNvSpPr/>
+            <p:nvPr/>
+          </p:nvSpPr>
+          <p:spPr>
+            <a:xfrm rot="10800000" flipV="1">
+              <a:off x="1292075" y="5064701"/>
+              <a:ext cx="1481542" cy="603443"/>
+            </a:xfrm>
+            <a:prstGeom prst="roundRect">
+              <a:avLst/>
+            </a:prstGeom>
+            <a:noFill/>
+            <a:ln w="38100">
+              <a:solidFill>
+                <a:schemeClr val="accent4">
+                  <a:lumMod val="60000"/>
+                  <a:lumOff val="40000"/>
+                </a:schemeClr>
+              </a:solidFill>
+            </a:ln>
+          </p:spPr>
+          <p:style>
+            <a:lnRef idx="2">
+              <a:schemeClr val="accent1">
+                <a:shade val="15000"/>
+              </a:schemeClr>
+            </a:lnRef>
+            <a:fillRef idx="1">
+              <a:schemeClr val="accent1"/>
+            </a:fillRef>
+            <a:effectRef idx="0">
+              <a:schemeClr val="accent1"/>
+            </a:effectRef>
+            <a:fontRef idx="minor">
+              <a:schemeClr val="lt1"/>
+            </a:fontRef>
+          </p:style>
+          <p:txBody>
+            <a:bodyPr rtlCol="0" anchor="ctr"/>
+            <a:lstStyle/>
+            <a:p>
+              <a:pPr algn="ctr"/>
+              <a:r>
+                <a:rPr lang="en-US" altLang="ko-KR" sz="1200" dirty="0" err="1">
+                  <a:solidFill>
+                    <a:schemeClr val="tx1"/>
+                  </a:solidFill>
+                </a:rPr>
+                <a:t>myagv_sensor</a:t>
+              </a:r>
+              <a:r>
+                <a:rPr lang="en-US" altLang="ko-KR" sz="1200" dirty="0">
+                  <a:solidFill>
+                    <a:schemeClr val="tx1"/>
+                  </a:solidFill>
+                </a:rPr>
+                <a:t>/</a:t>
+              </a:r>
+              <a:endParaRPr lang="ko-KR" altLang="en-US" sz="1200" dirty="0">
+                <a:solidFill>
+                  <a:schemeClr val="tx1"/>
+                </a:solidFill>
+              </a:endParaRPr>
+            </a:p>
+          </p:txBody>
+        </p:sp>
+        <p:sp>
+          <p:nvSpPr>
+            <p:cNvPr id="38" name="사각형: 둥근 모서리 37">
+              <a:extLst>
+                <a:ext uri="{FF2B5EF4-FFF2-40B4-BE49-F238E27FC236}">
+                  <a16:creationId xmlns:a16="http://schemas.microsoft.com/office/drawing/2014/main" id="{C930F89E-0876-0BDF-E825-946293DB1446}"/>
+                </a:ext>
+              </a:extLst>
+            </p:cNvPr>
+            <p:cNvSpPr/>
+            <p:nvPr/>
+          </p:nvSpPr>
+          <p:spPr>
+            <a:xfrm rot="10800000" flipV="1">
+              <a:off x="1292073" y="5938449"/>
+              <a:ext cx="1481542" cy="603443"/>
+            </a:xfrm>
+            <a:prstGeom prst="roundRect">
+              <a:avLst/>
+            </a:prstGeom>
+            <a:noFill/>
+            <a:ln w="38100">
+              <a:solidFill>
+                <a:schemeClr val="accent4">
+                  <a:lumMod val="60000"/>
+                  <a:lumOff val="40000"/>
+                </a:schemeClr>
+              </a:solidFill>
+            </a:ln>
+          </p:spPr>
+          <p:style>
+            <a:lnRef idx="2">
+              <a:schemeClr val="accent1">
+                <a:shade val="15000"/>
+              </a:schemeClr>
+            </a:lnRef>
+            <a:fillRef idx="1">
+              <a:schemeClr val="accent1"/>
+            </a:fillRef>
+            <a:effectRef idx="0">
+              <a:schemeClr val="accent1"/>
+            </a:effectRef>
+            <a:fontRef idx="minor">
+              <a:schemeClr val="lt1"/>
+            </a:fontRef>
+          </p:style>
+          <p:txBody>
+            <a:bodyPr rtlCol="0" anchor="ctr"/>
+            <a:lstStyle/>
+            <a:p>
+              <a:pPr algn="ctr"/>
+              <a:r>
+                <a:rPr lang="en-US" altLang="ko-KR" sz="1200" dirty="0" err="1">
+                  <a:solidFill>
+                    <a:schemeClr val="tx1"/>
+                  </a:solidFill>
+                </a:rPr>
+                <a:t>myagv_teleop</a:t>
+              </a:r>
+              <a:r>
+                <a:rPr lang="en-US" altLang="ko-KR" sz="1200" dirty="0">
+                  <a:solidFill>
+                    <a:schemeClr val="tx1"/>
+                  </a:solidFill>
+                </a:rPr>
+                <a:t>/</a:t>
+              </a:r>
+              <a:endParaRPr lang="ko-KR" altLang="en-US" sz="1200" dirty="0">
+                <a:solidFill>
+                  <a:schemeClr val="tx1"/>
+                </a:solidFill>
+              </a:endParaRPr>
+            </a:p>
+          </p:txBody>
+        </p:sp>
+        <p:cxnSp>
+          <p:nvCxnSpPr>
+            <p:cNvPr id="43" name="연결선: 꺾임 42">
+              <a:extLst>
+                <a:ext uri="{FF2B5EF4-FFF2-40B4-BE49-F238E27FC236}">
+                  <a16:creationId xmlns:a16="http://schemas.microsoft.com/office/drawing/2014/main" id="{58A11589-B740-A8CA-8B9F-2A896B977A38}"/>
+                </a:ext>
+              </a:extLst>
+            </p:cNvPr>
+            <p:cNvCxnSpPr>
+              <a:cxnSpLocks/>
+              <a:endCxn id="35" idx="3"/>
+            </p:cNvCxnSpPr>
+            <p:nvPr/>
+          </p:nvCxnSpPr>
+          <p:spPr>
+            <a:xfrm rot="16200000" flipH="1">
+              <a:off x="689291" y="2317849"/>
+              <a:ext cx="679613" cy="525956"/>
+            </a:xfrm>
+            <a:prstGeom prst="bentConnector2">
+              <a:avLst/>
+            </a:prstGeom>
+            <a:ln>
+              <a:tailEnd type="triangle"/>
+            </a:ln>
+          </p:spPr>
+          <p:style>
+            <a:lnRef idx="2">
+              <a:schemeClr val="accent1"/>
+            </a:lnRef>
+            <a:fillRef idx="0">
+              <a:schemeClr val="accent1"/>
+            </a:fillRef>
+            <a:effectRef idx="1">
+              <a:schemeClr val="accent1"/>
+            </a:effectRef>
+            <a:fontRef idx="minor">
+              <a:schemeClr val="tx1"/>
+            </a:fontRef>
+          </p:style>
+        </p:cxnSp>
+        <p:cxnSp>
+          <p:nvCxnSpPr>
+            <p:cNvPr id="46" name="연결선: 꺾임 45">
+              <a:extLst>
+                <a:ext uri="{FF2B5EF4-FFF2-40B4-BE49-F238E27FC236}">
+                  <a16:creationId xmlns:a16="http://schemas.microsoft.com/office/drawing/2014/main" id="{B790FDA7-5F8F-3E9D-E890-96054E002B7C}"/>
+                </a:ext>
+              </a:extLst>
+            </p:cNvPr>
+            <p:cNvCxnSpPr>
+              <a:cxnSpLocks/>
+              <a:endCxn id="36" idx="3"/>
+            </p:cNvCxnSpPr>
+            <p:nvPr/>
+          </p:nvCxnSpPr>
+          <p:spPr>
+            <a:xfrm rot="16200000" flipH="1">
+              <a:off x="307643" y="2734950"/>
+              <a:ext cx="1442901" cy="525963"/>
+            </a:xfrm>
+            <a:prstGeom prst="bentConnector2">
+              <a:avLst/>
+            </a:prstGeom>
+            <a:ln>
+              <a:tailEnd type="triangle"/>
+            </a:ln>
+          </p:spPr>
+          <p:style>
+            <a:lnRef idx="2">
+              <a:schemeClr val="accent1"/>
+            </a:lnRef>
+            <a:fillRef idx="0">
+              <a:schemeClr val="accent1"/>
+            </a:fillRef>
+            <a:effectRef idx="1">
+              <a:schemeClr val="accent1"/>
+            </a:effectRef>
+            <a:fontRef idx="minor">
+              <a:schemeClr val="tx1"/>
+            </a:fontRef>
+          </p:style>
+        </p:cxnSp>
+        <p:cxnSp>
+          <p:nvCxnSpPr>
+            <p:cNvPr id="47" name="연결선: 꺾임 46">
+              <a:extLst>
+                <a:ext uri="{FF2B5EF4-FFF2-40B4-BE49-F238E27FC236}">
+                  <a16:creationId xmlns:a16="http://schemas.microsoft.com/office/drawing/2014/main" id="{CCF9CA41-0D2C-CC2D-7B29-859A59ED8812}"/>
+                </a:ext>
+              </a:extLst>
+            </p:cNvPr>
+            <p:cNvCxnSpPr>
+              <a:cxnSpLocks/>
+              <a:endCxn id="37" idx="3"/>
+            </p:cNvCxnSpPr>
+            <p:nvPr/>
+          </p:nvCxnSpPr>
+          <p:spPr>
+            <a:xfrm rot="16200000" flipH="1">
+              <a:off x="-110946" y="3963402"/>
+              <a:ext cx="2280084" cy="525958"/>
+            </a:xfrm>
+            <a:prstGeom prst="bentConnector2">
+              <a:avLst/>
+            </a:prstGeom>
+            <a:ln>
+              <a:tailEnd type="triangle"/>
+            </a:ln>
+          </p:spPr>
+          <p:style>
+            <a:lnRef idx="2">
+              <a:schemeClr val="accent1"/>
+            </a:lnRef>
+            <a:fillRef idx="0">
+              <a:schemeClr val="accent1"/>
+            </a:fillRef>
+            <a:effectRef idx="1">
+              <a:schemeClr val="accent1"/>
+            </a:effectRef>
+            <a:fontRef idx="minor">
+              <a:schemeClr val="tx1"/>
+            </a:fontRef>
+          </p:style>
+        </p:cxnSp>
+        <p:cxnSp>
+          <p:nvCxnSpPr>
+            <p:cNvPr id="48" name="연결선: 꺾임 47">
+              <a:extLst>
+                <a:ext uri="{FF2B5EF4-FFF2-40B4-BE49-F238E27FC236}">
+                  <a16:creationId xmlns:a16="http://schemas.microsoft.com/office/drawing/2014/main" id="{5D1BBBB6-C7C9-CDF6-8EB9-1C1D7CA7A960}"/>
+                </a:ext>
+              </a:extLst>
+            </p:cNvPr>
+            <p:cNvCxnSpPr>
+              <a:cxnSpLocks/>
+              <a:endCxn id="38" idx="3"/>
+            </p:cNvCxnSpPr>
+            <p:nvPr/>
+          </p:nvCxnSpPr>
+          <p:spPr>
+            <a:xfrm rot="16200000" flipH="1">
+              <a:off x="-530092" y="4418006"/>
+              <a:ext cx="3118372" cy="525958"/>
+            </a:xfrm>
+            <a:prstGeom prst="bentConnector2">
+              <a:avLst/>
+            </a:prstGeom>
+            <a:ln>
+              <a:tailEnd type="triangle"/>
+            </a:ln>
+          </p:spPr>
+          <p:style>
+            <a:lnRef idx="2">
+              <a:schemeClr val="accent1"/>
+            </a:lnRef>
+            <a:fillRef idx="0">
+              <a:schemeClr val="accent1"/>
+            </a:fillRef>
+            <a:effectRef idx="1">
+              <a:schemeClr val="accent1"/>
+            </a:effectRef>
+            <a:fontRef idx="minor">
+              <a:schemeClr val="tx1"/>
+            </a:fontRef>
+          </p:style>
+        </p:cxnSp>
+        <p:sp>
+          <p:nvSpPr>
+            <p:cNvPr id="3" name="사각형: 둥근 모서리 2">
+              <a:extLst>
+                <a:ext uri="{FF2B5EF4-FFF2-40B4-BE49-F238E27FC236}">
+                  <a16:creationId xmlns:a16="http://schemas.microsoft.com/office/drawing/2014/main" id="{517E7824-2703-223B-7232-7862967DB9E6}"/>
+                </a:ext>
+              </a:extLst>
+            </p:cNvPr>
+            <p:cNvSpPr/>
+            <p:nvPr/>
+          </p:nvSpPr>
+          <p:spPr>
+            <a:xfrm rot="10800000" flipV="1">
+              <a:off x="1291719" y="4232011"/>
+              <a:ext cx="1481542" cy="603443"/>
+            </a:xfrm>
+            <a:prstGeom prst="roundRect">
+              <a:avLst/>
+            </a:prstGeom>
+            <a:noFill/>
+            <a:ln w="38100">
+              <a:solidFill>
+                <a:schemeClr val="accent4">
+                  <a:lumMod val="60000"/>
+                  <a:lumOff val="40000"/>
+                </a:schemeClr>
+              </a:solidFill>
+            </a:ln>
+          </p:spPr>
+          <p:style>
+            <a:lnRef idx="2">
+              <a:schemeClr val="accent1">
+                <a:shade val="15000"/>
+              </a:schemeClr>
+            </a:lnRef>
+            <a:fillRef idx="1">
+              <a:schemeClr val="accent1"/>
+            </a:fillRef>
+            <a:effectRef idx="0">
+              <a:schemeClr val="accent1"/>
+            </a:effectRef>
+            <a:fontRef idx="minor">
+              <a:schemeClr val="lt1"/>
+            </a:fontRef>
+          </p:style>
+          <p:txBody>
+            <a:bodyPr rtlCol="0" anchor="ctr"/>
+            <a:lstStyle/>
+            <a:p>
+              <a:pPr algn="ctr"/>
+              <a:r>
+                <a:rPr lang="en-US" altLang="ko-KR" sz="1100" dirty="0" err="1">
+                  <a:solidFill>
+                    <a:schemeClr val="tx1"/>
+                  </a:solidFill>
+                </a:rPr>
+                <a:t>myagv_vision_sub</a:t>
+              </a:r>
+              <a:r>
+                <a:rPr lang="en-US" altLang="ko-KR" sz="1100" dirty="0">
+                  <a:solidFill>
+                    <a:schemeClr val="tx1"/>
+                  </a:solidFill>
+                </a:rPr>
+                <a:t>/</a:t>
+              </a:r>
+              <a:endParaRPr lang="ko-KR" altLang="en-US" sz="1100" dirty="0">
+                <a:solidFill>
+                  <a:schemeClr val="tx1"/>
+                </a:solidFill>
+              </a:endParaRPr>
+            </a:p>
+          </p:txBody>
+        </p:sp>
+        <p:cxnSp>
+          <p:nvCxnSpPr>
+            <p:cNvPr id="5" name="연결선: 꺾임 4">
+              <a:extLst>
+                <a:ext uri="{FF2B5EF4-FFF2-40B4-BE49-F238E27FC236}">
+                  <a16:creationId xmlns:a16="http://schemas.microsoft.com/office/drawing/2014/main" id="{0C0E52A9-7DDA-6175-37CD-4A55F1012CB5}"/>
+                </a:ext>
+              </a:extLst>
+            </p:cNvPr>
+            <p:cNvCxnSpPr>
+              <a:cxnSpLocks/>
+              <a:endCxn id="3" idx="3"/>
+            </p:cNvCxnSpPr>
+            <p:nvPr/>
+          </p:nvCxnSpPr>
+          <p:spPr>
+            <a:xfrm rot="16200000" flipH="1">
+              <a:off x="-111302" y="3130712"/>
+              <a:ext cx="2280084" cy="525958"/>
+            </a:xfrm>
+            <a:prstGeom prst="bentConnector2">
+              <a:avLst/>
+            </a:prstGeom>
+            <a:ln>
+              <a:tailEnd type="triangle"/>
+            </a:ln>
+          </p:spPr>
+          <p:style>
+            <a:lnRef idx="2">
+              <a:schemeClr val="accent1"/>
+            </a:lnRef>
+            <a:fillRef idx="0">
+              <a:schemeClr val="accent1"/>
+            </a:fillRef>
+            <a:effectRef idx="1">
+              <a:schemeClr val="accent1"/>
+            </a:effectRef>
+            <a:fontRef idx="minor">
+              <a:schemeClr val="tx1"/>
+            </a:fontRef>
+          </p:style>
+        </p:cxnSp>
+      </p:grpSp>
       <p:sp>
         <p:nvSpPr>
           <p:cNvPr id="6" name="TextBox 5">
@@ -6997,432 +7040,453 @@
           </a:p>
         </p:txBody>
       </p:sp>
-      <p:sp>
-        <p:nvSpPr>
-          <p:cNvPr id="24" name="사각형: 둥근 모서리 23">
-            <a:extLst>
-              <a:ext uri="{FF2B5EF4-FFF2-40B4-BE49-F238E27FC236}">
-                <a16:creationId xmlns:a16="http://schemas.microsoft.com/office/drawing/2014/main" id="{C9F28680-4D3F-D1D5-A286-091EEE5D9B5E}"/>
-              </a:ext>
-            </a:extLst>
-          </p:cNvPr>
-          <p:cNvSpPr/>
+      <p:grpSp>
+        <p:nvGrpSpPr>
+          <p:cNvPr id="2" name="그룹 1">
+            <a:extLst>
+              <a:ext uri="{FF2B5EF4-FFF2-40B4-BE49-F238E27FC236}">
+                <a16:creationId xmlns:a16="http://schemas.microsoft.com/office/drawing/2014/main" id="{1E8AB3C6-A3C5-4B93-8260-F2B278908B6E}"/>
+              </a:ext>
+            </a:extLst>
+          </p:cNvPr>
+          <p:cNvGrpSpPr/>
           <p:nvPr/>
-        </p:nvSpPr>
-        <p:spPr>
-          <a:xfrm rot="10800000" flipV="1">
+        </p:nvGrpSpPr>
+        <p:grpSpPr>
+          <a:xfrm>
             <a:off x="551304" y="1637578"/>
-            <a:ext cx="1635842" cy="603443"/>
+            <a:ext cx="2222313" cy="4937937"/>
+            <a:chOff x="551304" y="1637578"/>
+            <a:chExt cx="2222313" cy="4937937"/>
           </a:xfrm>
-          <a:prstGeom prst="roundRect">
-            <a:avLst/>
-          </a:prstGeom>
-          <a:noFill/>
-          <a:ln w="38100">
-            <a:solidFill>
-              <a:schemeClr val="accent4">
-                <a:lumMod val="60000"/>
-                <a:lumOff val="40000"/>
+        </p:grpSpPr>
+        <p:sp>
+          <p:nvSpPr>
+            <p:cNvPr id="24" name="사각형: 둥근 모서리 23">
+              <a:extLst>
+                <a:ext uri="{FF2B5EF4-FFF2-40B4-BE49-F238E27FC236}">
+                  <a16:creationId xmlns:a16="http://schemas.microsoft.com/office/drawing/2014/main" id="{C9F28680-4D3F-D1D5-A286-091EEE5D9B5E}"/>
+                </a:ext>
+              </a:extLst>
+            </p:cNvPr>
+            <p:cNvSpPr/>
+            <p:nvPr/>
+          </p:nvSpPr>
+          <p:spPr>
+            <a:xfrm rot="10800000" flipV="1">
+              <a:off x="551304" y="1637578"/>
+              <a:ext cx="1635842" cy="603443"/>
+            </a:xfrm>
+            <a:prstGeom prst="roundRect">
+              <a:avLst/>
+            </a:prstGeom>
+            <a:noFill/>
+            <a:ln w="38100">
+              <a:solidFill>
+                <a:schemeClr val="accent4">
+                  <a:lumMod val="60000"/>
+                  <a:lumOff val="40000"/>
+                </a:schemeClr>
+              </a:solidFill>
+            </a:ln>
+          </p:spPr>
+          <p:style>
+            <a:lnRef idx="2">
+              <a:schemeClr val="accent1">
+                <a:shade val="15000"/>
               </a:schemeClr>
-            </a:solidFill>
-          </a:ln>
-        </p:spPr>
-        <p:style>
-          <a:lnRef idx="2">
-            <a:schemeClr val="accent1">
-              <a:shade val="15000"/>
-            </a:schemeClr>
-          </a:lnRef>
-          <a:fillRef idx="1">
-            <a:schemeClr val="accent1"/>
-          </a:fillRef>
-          <a:effectRef idx="0">
-            <a:schemeClr val="accent1"/>
-          </a:effectRef>
-          <a:fontRef idx="minor">
-            <a:schemeClr val="lt1"/>
-          </a:fontRef>
-        </p:style>
-        <p:txBody>
-          <a:bodyPr rtlCol="0" anchor="ctr"/>
-          <a:lstStyle/>
-          <a:p>
-            <a:pPr algn="ctr"/>
-            <a:r>
-              <a:rPr lang="en-US" altLang="ko-KR" dirty="0">
+            </a:lnRef>
+            <a:fillRef idx="1">
+              <a:schemeClr val="accent1"/>
+            </a:fillRef>
+            <a:effectRef idx="0">
+              <a:schemeClr val="accent1"/>
+            </a:effectRef>
+            <a:fontRef idx="minor">
+              <a:schemeClr val="lt1"/>
+            </a:fontRef>
+          </p:style>
+          <p:txBody>
+            <a:bodyPr rtlCol="0" anchor="ctr"/>
+            <a:lstStyle/>
+            <a:p>
+              <a:pPr algn="ctr"/>
+              <a:r>
+                <a:rPr lang="en-US" altLang="ko-KR" dirty="0">
+                  <a:solidFill>
+                    <a:schemeClr val="tx1"/>
+                  </a:solidFill>
+                </a:rPr>
+                <a:t>Ros1_ws2/</a:t>
+              </a:r>
+              <a:r>
+                <a:rPr lang="en-US" altLang="ko-KR" dirty="0" err="1">
+                  <a:solidFill>
+                    <a:schemeClr val="tx1"/>
+                  </a:solidFill>
+                </a:rPr>
+                <a:t>src</a:t>
+              </a:r>
+              <a:endParaRPr lang="ko-KR" altLang="en-US" dirty="0">
                 <a:solidFill>
                   <a:schemeClr val="tx1"/>
                 </a:solidFill>
-              </a:rPr>
-              <a:t>Ros1_ws2/</a:t>
-            </a:r>
-            <a:r>
-              <a:rPr lang="en-US" altLang="ko-KR" dirty="0" err="1">
+              </a:endParaRPr>
+            </a:p>
+          </p:txBody>
+        </p:sp>
+        <p:sp>
+          <p:nvSpPr>
+            <p:cNvPr id="25" name="사각형: 둥근 모서리 24">
+              <a:extLst>
+                <a:ext uri="{FF2B5EF4-FFF2-40B4-BE49-F238E27FC236}">
+                  <a16:creationId xmlns:a16="http://schemas.microsoft.com/office/drawing/2014/main" id="{57640915-4F5F-D884-88CB-88B9B3856FE6}"/>
+                </a:ext>
+              </a:extLst>
+            </p:cNvPr>
+            <p:cNvSpPr/>
+            <p:nvPr/>
+          </p:nvSpPr>
+          <p:spPr>
+            <a:xfrm rot="10800000" flipV="1">
+              <a:off x="1292075" y="2618912"/>
+              <a:ext cx="1481542" cy="603443"/>
+            </a:xfrm>
+            <a:prstGeom prst="roundRect">
+              <a:avLst/>
+            </a:prstGeom>
+            <a:noFill/>
+            <a:ln w="38100">
+              <a:solidFill>
+                <a:schemeClr val="accent4">
+                  <a:lumMod val="60000"/>
+                  <a:lumOff val="40000"/>
+                </a:schemeClr>
+              </a:solidFill>
+            </a:ln>
+          </p:spPr>
+          <p:style>
+            <a:lnRef idx="2">
+              <a:schemeClr val="accent1">
+                <a:shade val="15000"/>
+              </a:schemeClr>
+            </a:lnRef>
+            <a:fillRef idx="1">
+              <a:schemeClr val="accent1"/>
+            </a:fillRef>
+            <a:effectRef idx="0">
+              <a:schemeClr val="accent1"/>
+            </a:effectRef>
+            <a:fontRef idx="minor">
+              <a:schemeClr val="lt1"/>
+            </a:fontRef>
+          </p:style>
+          <p:txBody>
+            <a:bodyPr rtlCol="0" anchor="ctr"/>
+            <a:lstStyle/>
+            <a:p>
+              <a:pPr algn="ctr"/>
+              <a:r>
+                <a:rPr lang="en-US" altLang="ko-KR" sz="1200" dirty="0" err="1">
+                  <a:solidFill>
+                    <a:schemeClr val="tx1"/>
+                  </a:solidFill>
+                </a:rPr>
+                <a:t>myagv_slam</a:t>
+              </a:r>
+              <a:r>
+                <a:rPr lang="en-US" altLang="ko-KR" sz="1200" dirty="0">
+                  <a:solidFill>
+                    <a:schemeClr val="tx1"/>
+                  </a:solidFill>
+                </a:rPr>
+                <a:t>/</a:t>
+              </a:r>
+              <a:endParaRPr lang="ko-KR" altLang="en-US" sz="1200" dirty="0">
                 <a:solidFill>
                   <a:schemeClr val="tx1"/>
                 </a:solidFill>
-              </a:rPr>
-              <a:t>src</a:t>
-            </a:r>
-            <a:endParaRPr lang="ko-KR" altLang="en-US" dirty="0">
+              </a:endParaRPr>
+            </a:p>
+          </p:txBody>
+        </p:sp>
+        <p:sp>
+          <p:nvSpPr>
+            <p:cNvPr id="26" name="사각형: 둥근 모서리 25">
+              <a:extLst>
+                <a:ext uri="{FF2B5EF4-FFF2-40B4-BE49-F238E27FC236}">
+                  <a16:creationId xmlns:a16="http://schemas.microsoft.com/office/drawing/2014/main" id="{E5C50E7D-804C-98F1-BB3B-8249990169DB}"/>
+                </a:ext>
+              </a:extLst>
+            </p:cNvPr>
+            <p:cNvSpPr/>
+            <p:nvPr/>
+          </p:nvSpPr>
+          <p:spPr>
+            <a:xfrm rot="10800000" flipV="1">
+              <a:off x="1292075" y="4358648"/>
+              <a:ext cx="1481542" cy="603443"/>
+            </a:xfrm>
+            <a:prstGeom prst="roundRect">
+              <a:avLst/>
+            </a:prstGeom>
+            <a:noFill/>
+            <a:ln w="38100">
               <a:solidFill>
-                <a:schemeClr val="tx1"/>
+                <a:schemeClr val="accent4">
+                  <a:lumMod val="60000"/>
+                  <a:lumOff val="40000"/>
+                </a:schemeClr>
               </a:solidFill>
-            </a:endParaRPr>
-          </a:p>
-        </p:txBody>
-      </p:sp>
-      <p:sp>
-        <p:nvSpPr>
-          <p:cNvPr id="25" name="사각형: 둥근 모서리 24">
-            <a:extLst>
-              <a:ext uri="{FF2B5EF4-FFF2-40B4-BE49-F238E27FC236}">
-                <a16:creationId xmlns:a16="http://schemas.microsoft.com/office/drawing/2014/main" id="{57640915-4F5F-D884-88CB-88B9B3856FE6}"/>
-              </a:ext>
-            </a:extLst>
-          </p:cNvPr>
-          <p:cNvSpPr/>
-          <p:nvPr/>
-        </p:nvSpPr>
-        <p:spPr>
-          <a:xfrm rot="10800000" flipV="1">
-            <a:off x="1292075" y="2618912"/>
-            <a:ext cx="1481542" cy="603443"/>
-          </a:xfrm>
-          <a:prstGeom prst="roundRect">
-            <a:avLst/>
-          </a:prstGeom>
-          <a:noFill/>
-          <a:ln w="38100">
-            <a:solidFill>
-              <a:schemeClr val="accent4">
-                <a:lumMod val="60000"/>
-                <a:lumOff val="40000"/>
+            </a:ln>
+          </p:spPr>
+          <p:style>
+            <a:lnRef idx="2">
+              <a:schemeClr val="accent1">
+                <a:shade val="15000"/>
               </a:schemeClr>
-            </a:solidFill>
-          </a:ln>
-        </p:spPr>
-        <p:style>
-          <a:lnRef idx="2">
-            <a:schemeClr val="accent1">
-              <a:shade val="15000"/>
-            </a:schemeClr>
-          </a:lnRef>
-          <a:fillRef idx="1">
-            <a:schemeClr val="accent1"/>
-          </a:fillRef>
-          <a:effectRef idx="0">
-            <a:schemeClr val="accent1"/>
-          </a:effectRef>
-          <a:fontRef idx="minor">
-            <a:schemeClr val="lt1"/>
-          </a:fontRef>
-        </p:style>
-        <p:txBody>
-          <a:bodyPr rtlCol="0" anchor="ctr"/>
-          <a:lstStyle/>
-          <a:p>
-            <a:pPr algn="ctr"/>
-            <a:r>
-              <a:rPr lang="en-US" altLang="ko-KR" sz="1200" dirty="0" err="1">
+            </a:lnRef>
+            <a:fillRef idx="1">
+              <a:schemeClr val="accent1"/>
+            </a:fillRef>
+            <a:effectRef idx="0">
+              <a:schemeClr val="accent1"/>
+            </a:effectRef>
+            <a:fontRef idx="minor">
+              <a:schemeClr val="lt1"/>
+            </a:fontRef>
+          </p:style>
+          <p:txBody>
+            <a:bodyPr rtlCol="0" anchor="ctr"/>
+            <a:lstStyle/>
+            <a:p>
+              <a:pPr algn="ctr"/>
+              <a:r>
+                <a:rPr lang="en-US" altLang="ko-KR" sz="1100" dirty="0" err="1">
+                  <a:solidFill>
+                    <a:schemeClr val="tx1"/>
+                  </a:solidFill>
+                </a:rPr>
+                <a:t>myagv_navigation</a:t>
+              </a:r>
+              <a:r>
+                <a:rPr lang="en-US" altLang="ko-KR" sz="1100" dirty="0">
+                  <a:solidFill>
+                    <a:schemeClr val="tx1"/>
+                  </a:solidFill>
+                </a:rPr>
+                <a:t>/</a:t>
+              </a:r>
+              <a:endParaRPr lang="ko-KR" altLang="en-US" sz="1100" dirty="0">
                 <a:solidFill>
                   <a:schemeClr val="tx1"/>
                 </a:solidFill>
-              </a:rPr>
-              <a:t>myagv_slam</a:t>
-            </a:r>
-            <a:r>
-              <a:rPr lang="en-US" altLang="ko-KR" sz="1200" dirty="0">
+              </a:endParaRPr>
+            </a:p>
+          </p:txBody>
+        </p:sp>
+        <p:sp>
+          <p:nvSpPr>
+            <p:cNvPr id="28" name="사각형: 둥근 모서리 27">
+              <a:extLst>
+                <a:ext uri="{FF2B5EF4-FFF2-40B4-BE49-F238E27FC236}">
+                  <a16:creationId xmlns:a16="http://schemas.microsoft.com/office/drawing/2014/main" id="{7684EE82-88B8-23ED-39B9-648387B4B0A5}"/>
+                </a:ext>
+              </a:extLst>
+            </p:cNvPr>
+            <p:cNvSpPr/>
+            <p:nvPr/>
+          </p:nvSpPr>
+          <p:spPr>
+            <a:xfrm rot="10800000" flipV="1">
+              <a:off x="1292075" y="5972072"/>
+              <a:ext cx="1481542" cy="603443"/>
+            </a:xfrm>
+            <a:prstGeom prst="roundRect">
+              <a:avLst/>
+            </a:prstGeom>
+            <a:noFill/>
+            <a:ln w="38100">
+              <a:solidFill>
+                <a:schemeClr val="accent4">
+                  <a:lumMod val="60000"/>
+                  <a:lumOff val="40000"/>
+                </a:schemeClr>
+              </a:solidFill>
+            </a:ln>
+          </p:spPr>
+          <p:style>
+            <a:lnRef idx="2">
+              <a:schemeClr val="accent1">
+                <a:shade val="15000"/>
+              </a:schemeClr>
+            </a:lnRef>
+            <a:fillRef idx="1">
+              <a:schemeClr val="accent1"/>
+            </a:fillRef>
+            <a:effectRef idx="0">
+              <a:schemeClr val="accent1"/>
+            </a:effectRef>
+            <a:fontRef idx="minor">
+              <a:schemeClr val="lt1"/>
+            </a:fontRef>
+          </p:style>
+          <p:txBody>
+            <a:bodyPr rtlCol="0" anchor="ctr"/>
+            <a:lstStyle/>
+            <a:p>
+              <a:pPr algn="ctr"/>
+              <a:r>
+                <a:rPr lang="en-US" altLang="ko-KR" sz="1200" dirty="0" err="1">
+                  <a:solidFill>
+                    <a:schemeClr val="tx1"/>
+                  </a:solidFill>
+                </a:rPr>
+                <a:t>myagv_network</a:t>
+              </a:r>
+              <a:r>
+                <a:rPr lang="en-US" altLang="ko-KR" sz="1200" dirty="0">
+                  <a:solidFill>
+                    <a:schemeClr val="tx1"/>
+                  </a:solidFill>
+                </a:rPr>
+                <a:t>/</a:t>
+              </a:r>
+              <a:endParaRPr lang="ko-KR" altLang="en-US" sz="1200" dirty="0">
                 <a:solidFill>
                   <a:schemeClr val="tx1"/>
                 </a:solidFill>
-              </a:rPr>
-              <a:t>/</a:t>
-            </a:r>
-            <a:endParaRPr lang="ko-KR" altLang="en-US" sz="1200" dirty="0">
-              <a:solidFill>
-                <a:schemeClr val="tx1"/>
-              </a:solidFill>
-            </a:endParaRPr>
-          </a:p>
-        </p:txBody>
-      </p:sp>
-      <p:sp>
-        <p:nvSpPr>
-          <p:cNvPr id="26" name="사각형: 둥근 모서리 25">
-            <a:extLst>
-              <a:ext uri="{FF2B5EF4-FFF2-40B4-BE49-F238E27FC236}">
-                <a16:creationId xmlns:a16="http://schemas.microsoft.com/office/drawing/2014/main" id="{E5C50E7D-804C-98F1-BB3B-8249990169DB}"/>
-              </a:ext>
-            </a:extLst>
-          </p:cNvPr>
-          <p:cNvSpPr/>
-          <p:nvPr/>
-        </p:nvSpPr>
-        <p:spPr>
-          <a:xfrm rot="10800000" flipV="1">
-            <a:off x="1292075" y="4358648"/>
-            <a:ext cx="1481542" cy="603443"/>
-          </a:xfrm>
-          <a:prstGeom prst="roundRect">
-            <a:avLst/>
-          </a:prstGeom>
-          <a:noFill/>
-          <a:ln w="38100">
-            <a:solidFill>
-              <a:schemeClr val="accent4">
-                <a:lumMod val="60000"/>
-                <a:lumOff val="40000"/>
-              </a:schemeClr>
-            </a:solidFill>
-          </a:ln>
-        </p:spPr>
-        <p:style>
-          <a:lnRef idx="2">
-            <a:schemeClr val="accent1">
-              <a:shade val="15000"/>
-            </a:schemeClr>
-          </a:lnRef>
-          <a:fillRef idx="1">
-            <a:schemeClr val="accent1"/>
-          </a:fillRef>
-          <a:effectRef idx="0">
-            <a:schemeClr val="accent1"/>
-          </a:effectRef>
-          <a:fontRef idx="minor">
-            <a:schemeClr val="lt1"/>
-          </a:fontRef>
-        </p:style>
-        <p:txBody>
-          <a:bodyPr rtlCol="0" anchor="ctr"/>
-          <a:lstStyle/>
-          <a:p>
-            <a:pPr algn="ctr"/>
-            <a:r>
-              <a:rPr lang="en-US" altLang="ko-KR" sz="1100" dirty="0" err="1">
-                <a:solidFill>
-                  <a:schemeClr val="tx1"/>
-                </a:solidFill>
-              </a:rPr>
-              <a:t>myagv_navigation</a:t>
-            </a:r>
-            <a:r>
-              <a:rPr lang="en-US" altLang="ko-KR" sz="1100" dirty="0">
-                <a:solidFill>
-                  <a:schemeClr val="tx1"/>
-                </a:solidFill>
-              </a:rPr>
-              <a:t>/</a:t>
-            </a:r>
-            <a:endParaRPr lang="ko-KR" altLang="en-US" sz="1100" dirty="0">
-              <a:solidFill>
-                <a:schemeClr val="tx1"/>
-              </a:solidFill>
-            </a:endParaRPr>
-          </a:p>
-        </p:txBody>
-      </p:sp>
-      <p:sp>
-        <p:nvSpPr>
-          <p:cNvPr id="28" name="사각형: 둥근 모서리 27">
-            <a:extLst>
-              <a:ext uri="{FF2B5EF4-FFF2-40B4-BE49-F238E27FC236}">
-                <a16:creationId xmlns:a16="http://schemas.microsoft.com/office/drawing/2014/main" id="{7684EE82-88B8-23ED-39B9-648387B4B0A5}"/>
-              </a:ext>
-            </a:extLst>
-          </p:cNvPr>
-          <p:cNvSpPr/>
-          <p:nvPr/>
-        </p:nvSpPr>
-        <p:spPr>
-          <a:xfrm rot="10800000" flipV="1">
-            <a:off x="1292075" y="5972072"/>
-            <a:ext cx="1481542" cy="603443"/>
-          </a:xfrm>
-          <a:prstGeom prst="roundRect">
-            <a:avLst/>
-          </a:prstGeom>
-          <a:noFill/>
-          <a:ln w="38100">
-            <a:solidFill>
-              <a:schemeClr val="accent4">
-                <a:lumMod val="60000"/>
-                <a:lumOff val="40000"/>
-              </a:schemeClr>
-            </a:solidFill>
-          </a:ln>
-        </p:spPr>
-        <p:style>
-          <a:lnRef idx="2">
-            <a:schemeClr val="accent1">
-              <a:shade val="15000"/>
-            </a:schemeClr>
-          </a:lnRef>
-          <a:fillRef idx="1">
-            <a:schemeClr val="accent1"/>
-          </a:fillRef>
-          <a:effectRef idx="0">
-            <a:schemeClr val="accent1"/>
-          </a:effectRef>
-          <a:fontRef idx="minor">
-            <a:schemeClr val="lt1"/>
-          </a:fontRef>
-        </p:style>
-        <p:txBody>
-          <a:bodyPr rtlCol="0" anchor="ctr"/>
-          <a:lstStyle/>
-          <a:p>
-            <a:pPr algn="ctr"/>
-            <a:r>
-              <a:rPr lang="en-US" altLang="ko-KR" sz="1200" dirty="0" err="1">
-                <a:solidFill>
-                  <a:schemeClr val="tx1"/>
-                </a:solidFill>
-              </a:rPr>
-              <a:t>myagv_network</a:t>
-            </a:r>
-            <a:r>
-              <a:rPr lang="en-US" altLang="ko-KR" sz="1200" dirty="0">
-                <a:solidFill>
-                  <a:schemeClr val="tx1"/>
-                </a:solidFill>
-              </a:rPr>
-              <a:t>/</a:t>
-            </a:r>
-            <a:endParaRPr lang="ko-KR" altLang="en-US" sz="1200" dirty="0">
-              <a:solidFill>
-                <a:schemeClr val="tx1"/>
-              </a:solidFill>
-            </a:endParaRPr>
-          </a:p>
-        </p:txBody>
-      </p:sp>
-      <p:cxnSp>
-        <p:nvCxnSpPr>
-          <p:cNvPr id="30" name="연결선: 꺾임 29">
-            <a:extLst>
-              <a:ext uri="{FF2B5EF4-FFF2-40B4-BE49-F238E27FC236}">
-                <a16:creationId xmlns:a16="http://schemas.microsoft.com/office/drawing/2014/main" id="{C60E5604-4692-667C-ABB3-75894B655860}"/>
-              </a:ext>
-            </a:extLst>
-          </p:cNvPr>
-          <p:cNvCxnSpPr>
-            <a:cxnSpLocks/>
-            <a:endCxn id="25" idx="3"/>
-          </p:cNvCxnSpPr>
-          <p:nvPr/>
-        </p:nvCxnSpPr>
-        <p:spPr>
-          <a:xfrm rot="16200000" flipH="1">
-            <a:off x="689291" y="2317849"/>
-            <a:ext cx="679613" cy="525956"/>
-          </a:xfrm>
-          <a:prstGeom prst="bentConnector2">
-            <a:avLst/>
-          </a:prstGeom>
-          <a:ln>
-            <a:tailEnd type="triangle"/>
-          </a:ln>
-        </p:spPr>
-        <p:style>
-          <a:lnRef idx="2">
-            <a:schemeClr val="accent1"/>
-          </a:lnRef>
-          <a:fillRef idx="0">
-            <a:schemeClr val="accent1"/>
-          </a:fillRef>
-          <a:effectRef idx="1">
-            <a:schemeClr val="accent1"/>
-          </a:effectRef>
-          <a:fontRef idx="minor">
-            <a:schemeClr val="tx1"/>
-          </a:fontRef>
-        </p:style>
-      </p:cxnSp>
-      <p:cxnSp>
-        <p:nvCxnSpPr>
-          <p:cNvPr id="31" name="연결선: 꺾임 30">
-            <a:extLst>
-              <a:ext uri="{FF2B5EF4-FFF2-40B4-BE49-F238E27FC236}">
-                <a16:creationId xmlns:a16="http://schemas.microsoft.com/office/drawing/2014/main" id="{93B17E30-0DA1-D6FB-640D-D5A845056A84}"/>
-              </a:ext>
-            </a:extLst>
-          </p:cNvPr>
-          <p:cNvCxnSpPr>
-            <a:cxnSpLocks/>
-            <a:endCxn id="26" idx="3"/>
-          </p:cNvCxnSpPr>
-          <p:nvPr/>
-        </p:nvCxnSpPr>
-        <p:spPr>
-          <a:xfrm rot="16200000" flipH="1">
-            <a:off x="270143" y="3638438"/>
-            <a:ext cx="1517906" cy="525958"/>
-          </a:xfrm>
-          <a:prstGeom prst="bentConnector2">
-            <a:avLst/>
-          </a:prstGeom>
-          <a:ln>
-            <a:tailEnd type="triangle"/>
-          </a:ln>
-        </p:spPr>
-        <p:style>
-          <a:lnRef idx="2">
-            <a:schemeClr val="accent1"/>
-          </a:lnRef>
-          <a:fillRef idx="0">
-            <a:schemeClr val="accent1"/>
-          </a:fillRef>
-          <a:effectRef idx="1">
-            <a:schemeClr val="accent1"/>
-          </a:effectRef>
-          <a:fontRef idx="minor">
-            <a:schemeClr val="tx1"/>
-          </a:fontRef>
-        </p:style>
-      </p:cxnSp>
-      <p:cxnSp>
-        <p:nvCxnSpPr>
-          <p:cNvPr id="33" name="연결선: 꺾임 32">
-            <a:extLst>
-              <a:ext uri="{FF2B5EF4-FFF2-40B4-BE49-F238E27FC236}">
-                <a16:creationId xmlns:a16="http://schemas.microsoft.com/office/drawing/2014/main" id="{51BDC9DB-FF20-13A2-9752-E340F5827333}"/>
-              </a:ext>
-            </a:extLst>
-          </p:cNvPr>
-          <p:cNvCxnSpPr>
-            <a:cxnSpLocks/>
-            <a:endCxn id="28" idx="3"/>
-          </p:cNvCxnSpPr>
-          <p:nvPr/>
-        </p:nvCxnSpPr>
-        <p:spPr>
-          <a:xfrm rot="16200000" flipH="1">
-            <a:off x="-728276" y="4253443"/>
-            <a:ext cx="3514742" cy="525959"/>
-          </a:xfrm>
-          <a:prstGeom prst="bentConnector2">
-            <a:avLst/>
-          </a:prstGeom>
-          <a:ln>
-            <a:tailEnd type="triangle"/>
-          </a:ln>
-        </p:spPr>
-        <p:style>
-          <a:lnRef idx="2">
-            <a:schemeClr val="accent1"/>
-          </a:lnRef>
-          <a:fillRef idx="0">
-            <a:schemeClr val="accent1"/>
-          </a:fillRef>
-          <a:effectRef idx="1">
-            <a:schemeClr val="accent1"/>
-          </a:effectRef>
-          <a:fontRef idx="minor">
-            <a:schemeClr val="tx1"/>
-          </a:fontRef>
-        </p:style>
-      </p:cxnSp>
+              </a:endParaRPr>
+            </a:p>
+          </p:txBody>
+        </p:sp>
+        <p:cxnSp>
+          <p:nvCxnSpPr>
+            <p:cNvPr id="30" name="연결선: 꺾임 29">
+              <a:extLst>
+                <a:ext uri="{FF2B5EF4-FFF2-40B4-BE49-F238E27FC236}">
+                  <a16:creationId xmlns:a16="http://schemas.microsoft.com/office/drawing/2014/main" id="{C60E5604-4692-667C-ABB3-75894B655860}"/>
+                </a:ext>
+              </a:extLst>
+            </p:cNvPr>
+            <p:cNvCxnSpPr>
+              <a:cxnSpLocks/>
+              <a:endCxn id="25" idx="3"/>
+            </p:cNvCxnSpPr>
+            <p:nvPr/>
+          </p:nvCxnSpPr>
+          <p:spPr>
+            <a:xfrm rot="16200000" flipH="1">
+              <a:off x="689291" y="2317849"/>
+              <a:ext cx="679613" cy="525956"/>
+            </a:xfrm>
+            <a:prstGeom prst="bentConnector2">
+              <a:avLst/>
+            </a:prstGeom>
+            <a:ln>
+              <a:tailEnd type="triangle"/>
+            </a:ln>
+          </p:spPr>
+          <p:style>
+            <a:lnRef idx="2">
+              <a:schemeClr val="accent1"/>
+            </a:lnRef>
+            <a:fillRef idx="0">
+              <a:schemeClr val="accent1"/>
+            </a:fillRef>
+            <a:effectRef idx="1">
+              <a:schemeClr val="accent1"/>
+            </a:effectRef>
+            <a:fontRef idx="minor">
+              <a:schemeClr val="tx1"/>
+            </a:fontRef>
+          </p:style>
+        </p:cxnSp>
+        <p:cxnSp>
+          <p:nvCxnSpPr>
+            <p:cNvPr id="31" name="연결선: 꺾임 30">
+              <a:extLst>
+                <a:ext uri="{FF2B5EF4-FFF2-40B4-BE49-F238E27FC236}">
+                  <a16:creationId xmlns:a16="http://schemas.microsoft.com/office/drawing/2014/main" id="{93B17E30-0DA1-D6FB-640D-D5A845056A84}"/>
+                </a:ext>
+              </a:extLst>
+            </p:cNvPr>
+            <p:cNvCxnSpPr>
+              <a:cxnSpLocks/>
+              <a:endCxn id="26" idx="3"/>
+            </p:cNvCxnSpPr>
+            <p:nvPr/>
+          </p:nvCxnSpPr>
+          <p:spPr>
+            <a:xfrm rot="16200000" flipH="1">
+              <a:off x="270143" y="3638438"/>
+              <a:ext cx="1517906" cy="525958"/>
+            </a:xfrm>
+            <a:prstGeom prst="bentConnector2">
+              <a:avLst/>
+            </a:prstGeom>
+            <a:ln>
+              <a:tailEnd type="triangle"/>
+            </a:ln>
+          </p:spPr>
+          <p:style>
+            <a:lnRef idx="2">
+              <a:schemeClr val="accent1"/>
+            </a:lnRef>
+            <a:fillRef idx="0">
+              <a:schemeClr val="accent1"/>
+            </a:fillRef>
+            <a:effectRef idx="1">
+              <a:schemeClr val="accent1"/>
+            </a:effectRef>
+            <a:fontRef idx="minor">
+              <a:schemeClr val="tx1"/>
+            </a:fontRef>
+          </p:style>
+        </p:cxnSp>
+        <p:cxnSp>
+          <p:nvCxnSpPr>
+            <p:cNvPr id="33" name="연결선: 꺾임 32">
+              <a:extLst>
+                <a:ext uri="{FF2B5EF4-FFF2-40B4-BE49-F238E27FC236}">
+                  <a16:creationId xmlns:a16="http://schemas.microsoft.com/office/drawing/2014/main" id="{51BDC9DB-FF20-13A2-9752-E340F5827333}"/>
+                </a:ext>
+              </a:extLst>
+            </p:cNvPr>
+            <p:cNvCxnSpPr>
+              <a:cxnSpLocks/>
+              <a:endCxn id="28" idx="3"/>
+            </p:cNvCxnSpPr>
+            <p:nvPr/>
+          </p:nvCxnSpPr>
+          <p:spPr>
+            <a:xfrm rot="16200000" flipH="1">
+              <a:off x="-728276" y="4253443"/>
+              <a:ext cx="3514742" cy="525959"/>
+            </a:xfrm>
+            <a:prstGeom prst="bentConnector2">
+              <a:avLst/>
+            </a:prstGeom>
+            <a:ln>
+              <a:tailEnd type="triangle"/>
+            </a:ln>
+          </p:spPr>
+          <p:style>
+            <a:lnRef idx="2">
+              <a:schemeClr val="accent1"/>
+            </a:lnRef>
+            <a:fillRef idx="0">
+              <a:schemeClr val="accent1"/>
+            </a:fillRef>
+            <a:effectRef idx="1">
+              <a:schemeClr val="accent1"/>
+            </a:effectRef>
+            <a:fontRef idx="minor">
+              <a:schemeClr val="tx1"/>
+            </a:fontRef>
+          </p:style>
+        </p:cxnSp>
+      </p:grpSp>
       <p:sp>
         <p:nvSpPr>
           <p:cNvPr id="35" name="TextBox 34">
@@ -8166,265 +8230,6 @@
       </p:sp>
       <p:sp>
         <p:nvSpPr>
-          <p:cNvPr id="23" name="사각형: 둥근 모서리 22">
-            <a:extLst>
-              <a:ext uri="{FF2B5EF4-FFF2-40B4-BE49-F238E27FC236}">
-                <a16:creationId xmlns:a16="http://schemas.microsoft.com/office/drawing/2014/main" id="{A78C7802-2C73-E18C-5AC4-7C257FA57C6B}"/>
-              </a:ext>
-            </a:extLst>
-          </p:cNvPr>
-          <p:cNvSpPr/>
-          <p:nvPr/>
-        </p:nvSpPr>
-        <p:spPr>
-          <a:xfrm rot="10800000" flipV="1">
-            <a:off x="551304" y="1637578"/>
-            <a:ext cx="1635842" cy="603443"/>
-          </a:xfrm>
-          <a:prstGeom prst="roundRect">
-            <a:avLst/>
-          </a:prstGeom>
-          <a:noFill/>
-          <a:ln w="38100">
-            <a:solidFill>
-              <a:schemeClr val="accent4">
-                <a:lumMod val="60000"/>
-                <a:lumOff val="40000"/>
-              </a:schemeClr>
-            </a:solidFill>
-          </a:ln>
-        </p:spPr>
-        <p:style>
-          <a:lnRef idx="2">
-            <a:schemeClr val="accent1">
-              <a:shade val="15000"/>
-            </a:schemeClr>
-          </a:lnRef>
-          <a:fillRef idx="1">
-            <a:schemeClr val="accent1"/>
-          </a:fillRef>
-          <a:effectRef idx="0">
-            <a:schemeClr val="accent1"/>
-          </a:effectRef>
-          <a:fontRef idx="minor">
-            <a:schemeClr val="lt1"/>
-          </a:fontRef>
-        </p:style>
-        <p:txBody>
-          <a:bodyPr rtlCol="0" anchor="ctr"/>
-          <a:lstStyle/>
-          <a:p>
-            <a:pPr algn="ctr"/>
-            <a:r>
-              <a:rPr lang="en-US" altLang="ko-KR" dirty="0">
-                <a:solidFill>
-                  <a:schemeClr val="tx1"/>
-                </a:solidFill>
-              </a:rPr>
-              <a:t>Ros1_ws3/</a:t>
-            </a:r>
-            <a:r>
-              <a:rPr lang="en-US" altLang="ko-KR" dirty="0" err="1">
-                <a:solidFill>
-                  <a:schemeClr val="tx1"/>
-                </a:solidFill>
-              </a:rPr>
-              <a:t>src</a:t>
-            </a:r>
-            <a:endParaRPr lang="ko-KR" altLang="en-US" dirty="0">
-              <a:solidFill>
-                <a:schemeClr val="tx1"/>
-              </a:solidFill>
-            </a:endParaRPr>
-          </a:p>
-        </p:txBody>
-      </p:sp>
-      <p:sp>
-        <p:nvSpPr>
-          <p:cNvPr id="24" name="사각형: 둥근 모서리 23">
-            <a:extLst>
-              <a:ext uri="{FF2B5EF4-FFF2-40B4-BE49-F238E27FC236}">
-                <a16:creationId xmlns:a16="http://schemas.microsoft.com/office/drawing/2014/main" id="{D88159C8-3C49-4E3E-23AF-73FCD916A0BA}"/>
-              </a:ext>
-            </a:extLst>
-          </p:cNvPr>
-          <p:cNvSpPr/>
-          <p:nvPr/>
-        </p:nvSpPr>
-        <p:spPr>
-          <a:xfrm rot="10800000" flipV="1">
-            <a:off x="1292075" y="2432874"/>
-            <a:ext cx="1481542" cy="603443"/>
-          </a:xfrm>
-          <a:prstGeom prst="roundRect">
-            <a:avLst/>
-          </a:prstGeom>
-          <a:noFill/>
-          <a:ln w="38100">
-            <a:solidFill>
-              <a:schemeClr val="accent4">
-                <a:lumMod val="60000"/>
-                <a:lumOff val="40000"/>
-              </a:schemeClr>
-            </a:solidFill>
-          </a:ln>
-        </p:spPr>
-        <p:style>
-          <a:lnRef idx="2">
-            <a:schemeClr val="accent1">
-              <a:shade val="15000"/>
-            </a:schemeClr>
-          </a:lnRef>
-          <a:fillRef idx="1">
-            <a:schemeClr val="accent1"/>
-          </a:fillRef>
-          <a:effectRef idx="0">
-            <a:schemeClr val="accent1"/>
-          </a:effectRef>
-          <a:fontRef idx="minor">
-            <a:schemeClr val="lt1"/>
-          </a:fontRef>
-        </p:style>
-        <p:txBody>
-          <a:bodyPr rtlCol="0" anchor="ctr"/>
-          <a:lstStyle/>
-          <a:p>
-            <a:pPr algn="ctr"/>
-            <a:r>
-              <a:rPr lang="en-US" altLang="ko-KR" sz="1100" dirty="0" err="1">
-                <a:solidFill>
-                  <a:schemeClr val="tx1"/>
-                </a:solidFill>
-              </a:rPr>
-              <a:t>vision_ai_inference</a:t>
-            </a:r>
-            <a:r>
-              <a:rPr lang="en-US" altLang="ko-KR" sz="1100" dirty="0">
-                <a:solidFill>
-                  <a:schemeClr val="tx1"/>
-                </a:solidFill>
-              </a:rPr>
-              <a:t>/</a:t>
-            </a:r>
-            <a:endParaRPr lang="ko-KR" altLang="en-US" sz="1100" dirty="0">
-              <a:solidFill>
-                <a:schemeClr val="tx1"/>
-              </a:solidFill>
-            </a:endParaRPr>
-          </a:p>
-        </p:txBody>
-      </p:sp>
-      <p:sp>
-        <p:nvSpPr>
-          <p:cNvPr id="25" name="사각형: 둥근 모서리 24">
-            <a:extLst>
-              <a:ext uri="{FF2B5EF4-FFF2-40B4-BE49-F238E27FC236}">
-                <a16:creationId xmlns:a16="http://schemas.microsoft.com/office/drawing/2014/main" id="{C6A9A2C5-3F26-A122-73A7-DCAB445B8AA8}"/>
-              </a:ext>
-            </a:extLst>
-          </p:cNvPr>
-          <p:cNvSpPr/>
-          <p:nvPr/>
-        </p:nvSpPr>
-        <p:spPr>
-          <a:xfrm rot="10800000" flipV="1">
-            <a:off x="2032846" y="3186402"/>
-            <a:ext cx="1481542" cy="603443"/>
-          </a:xfrm>
-          <a:prstGeom prst="roundRect">
-            <a:avLst/>
-          </a:prstGeom>
-          <a:noFill/>
-          <a:ln w="38100">
-            <a:solidFill>
-              <a:schemeClr val="accent4">
-                <a:lumMod val="60000"/>
-                <a:lumOff val="40000"/>
-              </a:schemeClr>
-            </a:solidFill>
-          </a:ln>
-        </p:spPr>
-        <p:style>
-          <a:lnRef idx="2">
-            <a:schemeClr val="accent1">
-              <a:shade val="15000"/>
-            </a:schemeClr>
-          </a:lnRef>
-          <a:fillRef idx="1">
-            <a:schemeClr val="accent1"/>
-          </a:fillRef>
-          <a:effectRef idx="0">
-            <a:schemeClr val="accent1"/>
-          </a:effectRef>
-          <a:fontRef idx="minor">
-            <a:schemeClr val="lt1"/>
-          </a:fontRef>
-        </p:style>
-        <p:txBody>
-          <a:bodyPr rtlCol="0" anchor="ctr"/>
-          <a:lstStyle/>
-          <a:p>
-            <a:pPr algn="ctr"/>
-            <a:r>
-              <a:rPr lang="en-US" altLang="ko-KR" sz="1100" dirty="0">
-                <a:solidFill>
-                  <a:schemeClr val="tx1"/>
-                </a:solidFill>
-              </a:rPr>
-              <a:t>models/</a:t>
-            </a:r>
-            <a:endParaRPr lang="ko-KR" altLang="en-US" sz="1100" dirty="0">
-              <a:solidFill>
-                <a:schemeClr val="tx1"/>
-              </a:solidFill>
-            </a:endParaRPr>
-          </a:p>
-        </p:txBody>
-      </p:sp>
-      <p:cxnSp>
-        <p:nvCxnSpPr>
-          <p:cNvPr id="28" name="연결선: 꺾임 27">
-            <a:extLst>
-              <a:ext uri="{FF2B5EF4-FFF2-40B4-BE49-F238E27FC236}">
-                <a16:creationId xmlns:a16="http://schemas.microsoft.com/office/drawing/2014/main" id="{85C4E5EA-FAD1-B44D-7DA8-56D9B46D42BE}"/>
-              </a:ext>
-            </a:extLst>
-          </p:cNvPr>
-          <p:cNvCxnSpPr>
-            <a:cxnSpLocks/>
-            <a:endCxn id="24" idx="3"/>
-          </p:cNvCxnSpPr>
-          <p:nvPr/>
-        </p:nvCxnSpPr>
-        <p:spPr>
-          <a:xfrm rot="16200000" flipH="1">
-            <a:off x="805167" y="2247688"/>
-            <a:ext cx="497290" cy="476526"/>
-          </a:xfrm>
-          <a:prstGeom prst="bentConnector2">
-            <a:avLst/>
-          </a:prstGeom>
-          <a:ln>
-            <a:tailEnd type="triangle"/>
-          </a:ln>
-        </p:spPr>
-        <p:style>
-          <a:lnRef idx="2">
-            <a:schemeClr val="accent1"/>
-          </a:lnRef>
-          <a:fillRef idx="0">
-            <a:schemeClr val="accent1"/>
-          </a:fillRef>
-          <a:effectRef idx="1">
-            <a:schemeClr val="accent1"/>
-          </a:effectRef>
-          <a:fontRef idx="minor">
-            <a:schemeClr val="tx1"/>
-          </a:fontRef>
-        </p:style>
-      </p:cxnSp>
-      <p:sp>
-        <p:nvSpPr>
           <p:cNvPr id="32" name="TextBox 31">
             <a:extLst>
               <a:ext uri="{FF2B5EF4-FFF2-40B4-BE49-F238E27FC236}">
@@ -8685,382 +8490,662 @@
           </a:p>
         </p:txBody>
       </p:sp>
-      <p:cxnSp>
-        <p:nvCxnSpPr>
-          <p:cNvPr id="48" name="연결선: 꺾임 47">
-            <a:extLst>
-              <a:ext uri="{FF2B5EF4-FFF2-40B4-BE49-F238E27FC236}">
-                <a16:creationId xmlns:a16="http://schemas.microsoft.com/office/drawing/2014/main" id="{3D1B65DB-50F8-47D2-7B66-18F7D900D2C0}"/>
-              </a:ext>
-            </a:extLst>
-          </p:cNvPr>
-          <p:cNvCxnSpPr>
-            <a:cxnSpLocks/>
-          </p:cNvCxnSpPr>
+      <p:grpSp>
+        <p:nvGrpSpPr>
+          <p:cNvPr id="3" name="그룹 2">
+            <a:extLst>
+              <a:ext uri="{FF2B5EF4-FFF2-40B4-BE49-F238E27FC236}">
+                <a16:creationId xmlns:a16="http://schemas.microsoft.com/office/drawing/2014/main" id="{B307CAB7-1274-4A2C-99E6-6CB06981FCCD}"/>
+              </a:ext>
+            </a:extLst>
+          </p:cNvPr>
+          <p:cNvGrpSpPr/>
           <p:nvPr/>
-        </p:nvCxnSpPr>
-        <p:spPr>
-          <a:xfrm rot="16200000" flipH="1">
-            <a:off x="1424043" y="3128854"/>
-            <a:ext cx="679613" cy="525956"/>
+        </p:nvGrpSpPr>
+        <p:grpSpPr>
+          <a:xfrm>
+            <a:off x="551304" y="1637578"/>
+            <a:ext cx="2963084" cy="4878785"/>
+            <a:chOff x="551304" y="1637578"/>
+            <a:chExt cx="2963084" cy="4878785"/>
           </a:xfrm>
-          <a:prstGeom prst="bentConnector2">
-            <a:avLst/>
-          </a:prstGeom>
-          <a:ln>
-            <a:tailEnd type="triangle"/>
-          </a:ln>
-        </p:spPr>
-        <p:style>
-          <a:lnRef idx="2">
-            <a:schemeClr val="accent1"/>
-          </a:lnRef>
-          <a:fillRef idx="0">
-            <a:schemeClr val="accent1"/>
-          </a:fillRef>
-          <a:effectRef idx="1">
-            <a:schemeClr val="accent1"/>
-          </a:effectRef>
-          <a:fontRef idx="minor">
-            <a:schemeClr val="tx1"/>
-          </a:fontRef>
-        </p:style>
-      </p:cxnSp>
-      <p:sp>
-        <p:nvSpPr>
-          <p:cNvPr id="49" name="사각형: 둥근 모서리 48">
-            <a:extLst>
-              <a:ext uri="{FF2B5EF4-FFF2-40B4-BE49-F238E27FC236}">
-                <a16:creationId xmlns:a16="http://schemas.microsoft.com/office/drawing/2014/main" id="{1E433E3D-2311-065A-D472-35C3B13474C9}"/>
-              </a:ext>
-            </a:extLst>
-          </p:cNvPr>
-          <p:cNvSpPr/>
-          <p:nvPr/>
-        </p:nvSpPr>
-        <p:spPr>
-          <a:xfrm rot="10800000" flipV="1">
-            <a:off x="2032846" y="4097494"/>
-            <a:ext cx="1481542" cy="603443"/>
-          </a:xfrm>
-          <a:prstGeom prst="roundRect">
-            <a:avLst/>
-          </a:prstGeom>
-          <a:noFill/>
-          <a:ln w="38100">
-            <a:solidFill>
-              <a:schemeClr val="accent4">
-                <a:lumMod val="60000"/>
-                <a:lumOff val="40000"/>
+        </p:grpSpPr>
+        <p:sp>
+          <p:nvSpPr>
+            <p:cNvPr id="23" name="사각형: 둥근 모서리 22">
+              <a:extLst>
+                <a:ext uri="{FF2B5EF4-FFF2-40B4-BE49-F238E27FC236}">
+                  <a16:creationId xmlns:a16="http://schemas.microsoft.com/office/drawing/2014/main" id="{A78C7802-2C73-E18C-5AC4-7C257FA57C6B}"/>
+                </a:ext>
+              </a:extLst>
+            </p:cNvPr>
+            <p:cNvSpPr/>
+            <p:nvPr/>
+          </p:nvSpPr>
+          <p:spPr>
+            <a:xfrm rot="10800000" flipV="1">
+              <a:off x="551304" y="1637578"/>
+              <a:ext cx="1635842" cy="603443"/>
+            </a:xfrm>
+            <a:prstGeom prst="roundRect">
+              <a:avLst/>
+            </a:prstGeom>
+            <a:noFill/>
+            <a:ln w="38100">
+              <a:solidFill>
+                <a:schemeClr val="accent4">
+                  <a:lumMod val="60000"/>
+                  <a:lumOff val="40000"/>
+                </a:schemeClr>
+              </a:solidFill>
+            </a:ln>
+          </p:spPr>
+          <p:style>
+            <a:lnRef idx="2">
+              <a:schemeClr val="accent1">
+                <a:shade val="15000"/>
               </a:schemeClr>
-            </a:solidFill>
-          </a:ln>
-        </p:spPr>
-        <p:style>
-          <a:lnRef idx="2">
-            <a:schemeClr val="accent1">
-              <a:shade val="15000"/>
-            </a:schemeClr>
-          </a:lnRef>
-          <a:fillRef idx="1">
-            <a:schemeClr val="accent1"/>
-          </a:fillRef>
-          <a:effectRef idx="0">
-            <a:schemeClr val="accent1"/>
-          </a:effectRef>
-          <a:fontRef idx="minor">
-            <a:schemeClr val="lt1"/>
-          </a:fontRef>
-        </p:style>
-        <p:txBody>
-          <a:bodyPr rtlCol="0" anchor="ctr"/>
-          <a:lstStyle/>
-          <a:p>
-            <a:pPr algn="ctr"/>
-            <a:r>
-              <a:rPr lang="en-US" altLang="ko-KR" sz="1100" dirty="0" err="1">
+            </a:lnRef>
+            <a:fillRef idx="1">
+              <a:schemeClr val="accent1"/>
+            </a:fillRef>
+            <a:effectRef idx="0">
+              <a:schemeClr val="accent1"/>
+            </a:effectRef>
+            <a:fontRef idx="minor">
+              <a:schemeClr val="lt1"/>
+            </a:fontRef>
+          </p:style>
+          <p:txBody>
+            <a:bodyPr rtlCol="0" anchor="ctr"/>
+            <a:lstStyle/>
+            <a:p>
+              <a:pPr algn="ctr"/>
+              <a:r>
+                <a:rPr lang="en-US" altLang="ko-KR" dirty="0">
+                  <a:solidFill>
+                    <a:schemeClr val="tx1"/>
+                  </a:solidFill>
+                </a:rPr>
+                <a:t>Ros1_ws3/</a:t>
+              </a:r>
+              <a:r>
+                <a:rPr lang="en-US" altLang="ko-KR" dirty="0" err="1">
+                  <a:solidFill>
+                    <a:schemeClr val="tx1"/>
+                  </a:solidFill>
+                </a:rPr>
+                <a:t>src</a:t>
+              </a:r>
+              <a:endParaRPr lang="ko-KR" altLang="en-US" dirty="0">
                 <a:solidFill>
                   <a:schemeClr val="tx1"/>
                 </a:solidFill>
-              </a:rPr>
-              <a:t>src</a:t>
-            </a:r>
-            <a:r>
-              <a:rPr lang="en-US" altLang="ko-KR" sz="1100" dirty="0">
+              </a:endParaRPr>
+            </a:p>
+          </p:txBody>
+        </p:sp>
+        <p:sp>
+          <p:nvSpPr>
+            <p:cNvPr id="24" name="사각형: 둥근 모서리 23">
+              <a:extLst>
+                <a:ext uri="{FF2B5EF4-FFF2-40B4-BE49-F238E27FC236}">
+                  <a16:creationId xmlns:a16="http://schemas.microsoft.com/office/drawing/2014/main" id="{D88159C8-3C49-4E3E-23AF-73FCD916A0BA}"/>
+                </a:ext>
+              </a:extLst>
+            </p:cNvPr>
+            <p:cNvSpPr/>
+            <p:nvPr/>
+          </p:nvSpPr>
+          <p:spPr>
+            <a:xfrm rot="10800000" flipV="1">
+              <a:off x="1292075" y="2432874"/>
+              <a:ext cx="1481542" cy="603443"/>
+            </a:xfrm>
+            <a:prstGeom prst="roundRect">
+              <a:avLst/>
+            </a:prstGeom>
+            <a:noFill/>
+            <a:ln w="38100">
+              <a:solidFill>
+                <a:schemeClr val="accent4">
+                  <a:lumMod val="60000"/>
+                  <a:lumOff val="40000"/>
+                </a:schemeClr>
+              </a:solidFill>
+            </a:ln>
+          </p:spPr>
+          <p:style>
+            <a:lnRef idx="2">
+              <a:schemeClr val="accent1">
+                <a:shade val="15000"/>
+              </a:schemeClr>
+            </a:lnRef>
+            <a:fillRef idx="1">
+              <a:schemeClr val="accent1"/>
+            </a:fillRef>
+            <a:effectRef idx="0">
+              <a:schemeClr val="accent1"/>
+            </a:effectRef>
+            <a:fontRef idx="minor">
+              <a:schemeClr val="lt1"/>
+            </a:fontRef>
+          </p:style>
+          <p:txBody>
+            <a:bodyPr rtlCol="0" anchor="ctr"/>
+            <a:lstStyle/>
+            <a:p>
+              <a:pPr algn="ctr"/>
+              <a:r>
+                <a:rPr lang="en-US" altLang="ko-KR" sz="1100" dirty="0" err="1">
+                  <a:solidFill>
+                    <a:schemeClr val="tx1"/>
+                  </a:solidFill>
+                </a:rPr>
+                <a:t>vision_ai_inference</a:t>
+              </a:r>
+              <a:r>
+                <a:rPr lang="en-US" altLang="ko-KR" sz="1100" dirty="0">
+                  <a:solidFill>
+                    <a:schemeClr val="tx1"/>
+                  </a:solidFill>
+                </a:rPr>
+                <a:t>/</a:t>
+              </a:r>
+              <a:endParaRPr lang="ko-KR" altLang="en-US" sz="1100" dirty="0">
                 <a:solidFill>
                   <a:schemeClr val="tx1"/>
                 </a:solidFill>
-              </a:rPr>
-              <a:t>/</a:t>
-            </a:r>
-            <a:endParaRPr lang="ko-KR" altLang="en-US" sz="1100" dirty="0">
+              </a:endParaRPr>
+            </a:p>
+          </p:txBody>
+        </p:sp>
+        <p:sp>
+          <p:nvSpPr>
+            <p:cNvPr id="25" name="사각형: 둥근 모서리 24">
+              <a:extLst>
+                <a:ext uri="{FF2B5EF4-FFF2-40B4-BE49-F238E27FC236}">
+                  <a16:creationId xmlns:a16="http://schemas.microsoft.com/office/drawing/2014/main" id="{C6A9A2C5-3F26-A122-73A7-DCAB445B8AA8}"/>
+                </a:ext>
+              </a:extLst>
+            </p:cNvPr>
+            <p:cNvSpPr/>
+            <p:nvPr/>
+          </p:nvSpPr>
+          <p:spPr>
+            <a:xfrm rot="10800000" flipV="1">
+              <a:off x="2032846" y="3186402"/>
+              <a:ext cx="1481542" cy="603443"/>
+            </a:xfrm>
+            <a:prstGeom prst="roundRect">
+              <a:avLst/>
+            </a:prstGeom>
+            <a:noFill/>
+            <a:ln w="38100">
               <a:solidFill>
-                <a:schemeClr val="tx1"/>
+                <a:schemeClr val="accent4">
+                  <a:lumMod val="60000"/>
+                  <a:lumOff val="40000"/>
+                </a:schemeClr>
               </a:solidFill>
-            </a:endParaRPr>
-          </a:p>
-        </p:txBody>
-      </p:sp>
-      <p:cxnSp>
-        <p:nvCxnSpPr>
-          <p:cNvPr id="50" name="연결선: 꺾임 49">
-            <a:extLst>
-              <a:ext uri="{FF2B5EF4-FFF2-40B4-BE49-F238E27FC236}">
-                <a16:creationId xmlns:a16="http://schemas.microsoft.com/office/drawing/2014/main" id="{053A5135-5140-1443-EB3A-A4285A8968BA}"/>
-              </a:ext>
-            </a:extLst>
-          </p:cNvPr>
-          <p:cNvCxnSpPr>
-            <a:cxnSpLocks/>
-            <a:endCxn id="49" idx="3"/>
-          </p:cNvCxnSpPr>
-          <p:nvPr/>
-        </p:nvCxnSpPr>
-        <p:spPr>
-          <a:xfrm rot="16200000" flipH="1">
-            <a:off x="1117476" y="3483845"/>
-            <a:ext cx="1298765" cy="531975"/>
-          </a:xfrm>
-          <a:prstGeom prst="bentConnector2">
-            <a:avLst/>
-          </a:prstGeom>
-          <a:ln>
-            <a:tailEnd type="triangle"/>
-          </a:ln>
-        </p:spPr>
-        <p:style>
-          <a:lnRef idx="2">
-            <a:schemeClr val="accent1"/>
-          </a:lnRef>
-          <a:fillRef idx="0">
-            <a:schemeClr val="accent1"/>
-          </a:fillRef>
-          <a:effectRef idx="1">
-            <a:schemeClr val="accent1"/>
-          </a:effectRef>
-          <a:fontRef idx="minor">
-            <a:schemeClr val="tx1"/>
-          </a:fontRef>
-        </p:style>
-      </p:cxnSp>
-      <p:sp>
-        <p:nvSpPr>
-          <p:cNvPr id="51" name="사각형: 둥근 모서리 50">
-            <a:extLst>
-              <a:ext uri="{FF2B5EF4-FFF2-40B4-BE49-F238E27FC236}">
-                <a16:creationId xmlns:a16="http://schemas.microsoft.com/office/drawing/2014/main" id="{163E6B17-F6A1-5171-F0A9-FE7BEFB6FE16}"/>
-              </a:ext>
-            </a:extLst>
-          </p:cNvPr>
-          <p:cNvSpPr/>
-          <p:nvPr/>
-        </p:nvSpPr>
-        <p:spPr>
-          <a:xfrm rot="10800000" flipV="1">
-            <a:off x="2032846" y="5005912"/>
-            <a:ext cx="1481542" cy="603443"/>
-          </a:xfrm>
-          <a:prstGeom prst="roundRect">
-            <a:avLst/>
-          </a:prstGeom>
-          <a:noFill/>
-          <a:ln w="38100">
-            <a:solidFill>
-              <a:schemeClr val="accent4">
-                <a:lumMod val="60000"/>
-                <a:lumOff val="40000"/>
+            </a:ln>
+          </p:spPr>
+          <p:style>
+            <a:lnRef idx="2">
+              <a:schemeClr val="accent1">
+                <a:shade val="15000"/>
               </a:schemeClr>
-            </a:solidFill>
-          </a:ln>
-        </p:spPr>
-        <p:style>
-          <a:lnRef idx="2">
-            <a:schemeClr val="accent1">
-              <a:shade val="15000"/>
-            </a:schemeClr>
-          </a:lnRef>
-          <a:fillRef idx="1">
-            <a:schemeClr val="accent1"/>
-          </a:fillRef>
-          <a:effectRef idx="0">
-            <a:schemeClr val="accent1"/>
-          </a:effectRef>
-          <a:fontRef idx="minor">
-            <a:schemeClr val="lt1"/>
-          </a:fontRef>
-        </p:style>
-        <p:txBody>
-          <a:bodyPr rtlCol="0" anchor="ctr"/>
-          <a:lstStyle/>
-          <a:p>
-            <a:pPr algn="ctr"/>
-            <a:r>
-              <a:rPr lang="en-US" altLang="ko-KR" sz="1100" dirty="0">
+            </a:lnRef>
+            <a:fillRef idx="1">
+              <a:schemeClr val="accent1"/>
+            </a:fillRef>
+            <a:effectRef idx="0">
+              <a:schemeClr val="accent1"/>
+            </a:effectRef>
+            <a:fontRef idx="minor">
+              <a:schemeClr val="lt1"/>
+            </a:fontRef>
+          </p:style>
+          <p:txBody>
+            <a:bodyPr rtlCol="0" anchor="ctr"/>
+            <a:lstStyle/>
+            <a:p>
+              <a:pPr algn="ctr"/>
+              <a:r>
+                <a:rPr lang="en-US" altLang="ko-KR" sz="1100" dirty="0">
+                  <a:solidFill>
+                    <a:schemeClr val="tx1"/>
+                  </a:solidFill>
+                </a:rPr>
+                <a:t>models/</a:t>
+              </a:r>
+              <a:endParaRPr lang="ko-KR" altLang="en-US" sz="1100" dirty="0">
                 <a:solidFill>
                   <a:schemeClr val="tx1"/>
                 </a:solidFill>
-              </a:rPr>
-              <a:t>config/</a:t>
-            </a:r>
-            <a:endParaRPr lang="ko-KR" altLang="en-US" sz="1100" dirty="0">
+              </a:endParaRPr>
+            </a:p>
+          </p:txBody>
+        </p:sp>
+        <p:cxnSp>
+          <p:nvCxnSpPr>
+            <p:cNvPr id="28" name="연결선: 꺾임 27">
+              <a:extLst>
+                <a:ext uri="{FF2B5EF4-FFF2-40B4-BE49-F238E27FC236}">
+                  <a16:creationId xmlns:a16="http://schemas.microsoft.com/office/drawing/2014/main" id="{85C4E5EA-FAD1-B44D-7DA8-56D9B46D42BE}"/>
+                </a:ext>
+              </a:extLst>
+            </p:cNvPr>
+            <p:cNvCxnSpPr>
+              <a:cxnSpLocks/>
+              <a:endCxn id="24" idx="3"/>
+            </p:cNvCxnSpPr>
+            <p:nvPr/>
+          </p:nvCxnSpPr>
+          <p:spPr>
+            <a:xfrm rot="16200000" flipH="1">
+              <a:off x="805167" y="2247688"/>
+              <a:ext cx="497290" cy="476526"/>
+            </a:xfrm>
+            <a:prstGeom prst="bentConnector2">
+              <a:avLst/>
+            </a:prstGeom>
+            <a:ln>
+              <a:tailEnd type="triangle"/>
+            </a:ln>
+          </p:spPr>
+          <p:style>
+            <a:lnRef idx="2">
+              <a:schemeClr val="accent1"/>
+            </a:lnRef>
+            <a:fillRef idx="0">
+              <a:schemeClr val="accent1"/>
+            </a:fillRef>
+            <a:effectRef idx="1">
+              <a:schemeClr val="accent1"/>
+            </a:effectRef>
+            <a:fontRef idx="minor">
+              <a:schemeClr val="tx1"/>
+            </a:fontRef>
+          </p:style>
+        </p:cxnSp>
+        <p:cxnSp>
+          <p:nvCxnSpPr>
+            <p:cNvPr id="48" name="연결선: 꺾임 47">
+              <a:extLst>
+                <a:ext uri="{FF2B5EF4-FFF2-40B4-BE49-F238E27FC236}">
+                  <a16:creationId xmlns:a16="http://schemas.microsoft.com/office/drawing/2014/main" id="{3D1B65DB-50F8-47D2-7B66-18F7D900D2C0}"/>
+                </a:ext>
+              </a:extLst>
+            </p:cNvPr>
+            <p:cNvCxnSpPr>
+              <a:cxnSpLocks/>
+            </p:cNvCxnSpPr>
+            <p:nvPr/>
+          </p:nvCxnSpPr>
+          <p:spPr>
+            <a:xfrm rot="16200000" flipH="1">
+              <a:off x="1424043" y="3128854"/>
+              <a:ext cx="679613" cy="525956"/>
+            </a:xfrm>
+            <a:prstGeom prst="bentConnector2">
+              <a:avLst/>
+            </a:prstGeom>
+            <a:ln>
+              <a:tailEnd type="triangle"/>
+            </a:ln>
+          </p:spPr>
+          <p:style>
+            <a:lnRef idx="2">
+              <a:schemeClr val="accent1"/>
+            </a:lnRef>
+            <a:fillRef idx="0">
+              <a:schemeClr val="accent1"/>
+            </a:fillRef>
+            <a:effectRef idx="1">
+              <a:schemeClr val="accent1"/>
+            </a:effectRef>
+            <a:fontRef idx="minor">
+              <a:schemeClr val="tx1"/>
+            </a:fontRef>
+          </p:style>
+        </p:cxnSp>
+        <p:sp>
+          <p:nvSpPr>
+            <p:cNvPr id="49" name="사각형: 둥근 모서리 48">
+              <a:extLst>
+                <a:ext uri="{FF2B5EF4-FFF2-40B4-BE49-F238E27FC236}">
+                  <a16:creationId xmlns:a16="http://schemas.microsoft.com/office/drawing/2014/main" id="{1E433E3D-2311-065A-D472-35C3B13474C9}"/>
+                </a:ext>
+              </a:extLst>
+            </p:cNvPr>
+            <p:cNvSpPr/>
+            <p:nvPr/>
+          </p:nvSpPr>
+          <p:spPr>
+            <a:xfrm rot="10800000" flipV="1">
+              <a:off x="2032846" y="4097494"/>
+              <a:ext cx="1481542" cy="603443"/>
+            </a:xfrm>
+            <a:prstGeom prst="roundRect">
+              <a:avLst/>
+            </a:prstGeom>
+            <a:noFill/>
+            <a:ln w="38100">
               <a:solidFill>
-                <a:schemeClr val="tx1"/>
+                <a:schemeClr val="accent4">
+                  <a:lumMod val="60000"/>
+                  <a:lumOff val="40000"/>
+                </a:schemeClr>
               </a:solidFill>
-            </a:endParaRPr>
-          </a:p>
-        </p:txBody>
-      </p:sp>
-      <p:cxnSp>
-        <p:nvCxnSpPr>
-          <p:cNvPr id="52" name="연결선: 꺾임 51">
-            <a:extLst>
-              <a:ext uri="{FF2B5EF4-FFF2-40B4-BE49-F238E27FC236}">
-                <a16:creationId xmlns:a16="http://schemas.microsoft.com/office/drawing/2014/main" id="{091E5D5F-972F-4855-AA53-7CF0926E9446}"/>
-              </a:ext>
-            </a:extLst>
-          </p:cNvPr>
-          <p:cNvCxnSpPr>
-            <a:cxnSpLocks/>
-            <a:endCxn id="51" idx="3"/>
-          </p:cNvCxnSpPr>
-          <p:nvPr/>
-        </p:nvCxnSpPr>
-        <p:spPr>
-          <a:xfrm rot="16200000" flipH="1">
-            <a:off x="643324" y="3918112"/>
-            <a:ext cx="2241046" cy="537997"/>
-          </a:xfrm>
-          <a:prstGeom prst="bentConnector2">
-            <a:avLst/>
-          </a:prstGeom>
-          <a:ln>
-            <a:tailEnd type="triangle"/>
-          </a:ln>
-        </p:spPr>
-        <p:style>
-          <a:lnRef idx="2">
-            <a:schemeClr val="accent1"/>
-          </a:lnRef>
-          <a:fillRef idx="0">
-            <a:schemeClr val="accent1"/>
-          </a:fillRef>
-          <a:effectRef idx="1">
-            <a:schemeClr val="accent1"/>
-          </a:effectRef>
-          <a:fontRef idx="minor">
-            <a:schemeClr val="tx1"/>
-          </a:fontRef>
-        </p:style>
-      </p:cxnSp>
-      <p:sp>
-        <p:nvSpPr>
-          <p:cNvPr id="53" name="사각형: 둥근 모서리 52">
-            <a:extLst>
-              <a:ext uri="{FF2B5EF4-FFF2-40B4-BE49-F238E27FC236}">
-                <a16:creationId xmlns:a16="http://schemas.microsoft.com/office/drawing/2014/main" id="{2DF0EBFD-901D-2DAE-2D77-F80DC2EF7D76}"/>
-              </a:ext>
-            </a:extLst>
-          </p:cNvPr>
-          <p:cNvSpPr/>
-          <p:nvPr/>
-        </p:nvSpPr>
-        <p:spPr>
-          <a:xfrm rot="10800000" flipV="1">
-            <a:off x="2032846" y="5912920"/>
-            <a:ext cx="1481542" cy="603443"/>
-          </a:xfrm>
-          <a:prstGeom prst="roundRect">
-            <a:avLst/>
-          </a:prstGeom>
-          <a:noFill/>
-          <a:ln w="38100">
-            <a:solidFill>
-              <a:schemeClr val="accent4">
-                <a:lumMod val="60000"/>
-                <a:lumOff val="40000"/>
+            </a:ln>
+          </p:spPr>
+          <p:style>
+            <a:lnRef idx="2">
+              <a:schemeClr val="accent1">
+                <a:shade val="15000"/>
               </a:schemeClr>
-            </a:solidFill>
-          </a:ln>
-        </p:spPr>
-        <p:style>
-          <a:lnRef idx="2">
-            <a:schemeClr val="accent1">
-              <a:shade val="15000"/>
-            </a:schemeClr>
-          </a:lnRef>
-          <a:fillRef idx="1">
-            <a:schemeClr val="accent1"/>
-          </a:fillRef>
-          <a:effectRef idx="0">
-            <a:schemeClr val="accent1"/>
-          </a:effectRef>
-          <a:fontRef idx="minor">
-            <a:schemeClr val="lt1"/>
-          </a:fontRef>
-        </p:style>
-        <p:txBody>
-          <a:bodyPr rtlCol="0" anchor="ctr"/>
-          <a:lstStyle/>
-          <a:p>
-            <a:pPr algn="ctr"/>
-            <a:r>
-              <a:rPr lang="en-US" altLang="ko-KR" sz="1100" dirty="0">
+            </a:lnRef>
+            <a:fillRef idx="1">
+              <a:schemeClr val="accent1"/>
+            </a:fillRef>
+            <a:effectRef idx="0">
+              <a:schemeClr val="accent1"/>
+            </a:effectRef>
+            <a:fontRef idx="minor">
+              <a:schemeClr val="lt1"/>
+            </a:fontRef>
+          </p:style>
+          <p:txBody>
+            <a:bodyPr rtlCol="0" anchor="ctr"/>
+            <a:lstStyle/>
+            <a:p>
+              <a:pPr algn="ctr"/>
+              <a:r>
+                <a:rPr lang="en-US" altLang="ko-KR" sz="1100" dirty="0" err="1">
+                  <a:solidFill>
+                    <a:schemeClr val="tx1"/>
+                  </a:solidFill>
+                </a:rPr>
+                <a:t>src</a:t>
+              </a:r>
+              <a:r>
+                <a:rPr lang="en-US" altLang="ko-KR" sz="1100" dirty="0">
+                  <a:solidFill>
+                    <a:schemeClr val="tx1"/>
+                  </a:solidFill>
+                </a:rPr>
+                <a:t>/</a:t>
+              </a:r>
+              <a:endParaRPr lang="ko-KR" altLang="en-US" sz="1100" dirty="0">
                 <a:solidFill>
                   <a:schemeClr val="tx1"/>
                 </a:solidFill>
-              </a:rPr>
-              <a:t>launch/</a:t>
-            </a:r>
-            <a:endParaRPr lang="ko-KR" altLang="en-US" sz="1100" dirty="0">
+              </a:endParaRPr>
+            </a:p>
+          </p:txBody>
+        </p:sp>
+        <p:cxnSp>
+          <p:nvCxnSpPr>
+            <p:cNvPr id="50" name="연결선: 꺾임 49">
+              <a:extLst>
+                <a:ext uri="{FF2B5EF4-FFF2-40B4-BE49-F238E27FC236}">
+                  <a16:creationId xmlns:a16="http://schemas.microsoft.com/office/drawing/2014/main" id="{053A5135-5140-1443-EB3A-A4285A8968BA}"/>
+                </a:ext>
+              </a:extLst>
+            </p:cNvPr>
+            <p:cNvCxnSpPr>
+              <a:cxnSpLocks/>
+              <a:endCxn id="49" idx="3"/>
+            </p:cNvCxnSpPr>
+            <p:nvPr/>
+          </p:nvCxnSpPr>
+          <p:spPr>
+            <a:xfrm rot="16200000" flipH="1">
+              <a:off x="1117476" y="3483845"/>
+              <a:ext cx="1298765" cy="531975"/>
+            </a:xfrm>
+            <a:prstGeom prst="bentConnector2">
+              <a:avLst/>
+            </a:prstGeom>
+            <a:ln>
+              <a:tailEnd type="triangle"/>
+            </a:ln>
+          </p:spPr>
+          <p:style>
+            <a:lnRef idx="2">
+              <a:schemeClr val="accent1"/>
+            </a:lnRef>
+            <a:fillRef idx="0">
+              <a:schemeClr val="accent1"/>
+            </a:fillRef>
+            <a:effectRef idx="1">
+              <a:schemeClr val="accent1"/>
+            </a:effectRef>
+            <a:fontRef idx="minor">
+              <a:schemeClr val="tx1"/>
+            </a:fontRef>
+          </p:style>
+        </p:cxnSp>
+        <p:sp>
+          <p:nvSpPr>
+            <p:cNvPr id="51" name="사각형: 둥근 모서리 50">
+              <a:extLst>
+                <a:ext uri="{FF2B5EF4-FFF2-40B4-BE49-F238E27FC236}">
+                  <a16:creationId xmlns:a16="http://schemas.microsoft.com/office/drawing/2014/main" id="{163E6B17-F6A1-5171-F0A9-FE7BEFB6FE16}"/>
+                </a:ext>
+              </a:extLst>
+            </p:cNvPr>
+            <p:cNvSpPr/>
+            <p:nvPr/>
+          </p:nvSpPr>
+          <p:spPr>
+            <a:xfrm rot="10800000" flipV="1">
+              <a:off x="2032846" y="5005912"/>
+              <a:ext cx="1481542" cy="603443"/>
+            </a:xfrm>
+            <a:prstGeom prst="roundRect">
+              <a:avLst/>
+            </a:prstGeom>
+            <a:noFill/>
+            <a:ln w="38100">
               <a:solidFill>
-                <a:schemeClr val="tx1"/>
+                <a:schemeClr val="accent4">
+                  <a:lumMod val="60000"/>
+                  <a:lumOff val="40000"/>
+                </a:schemeClr>
               </a:solidFill>
-            </a:endParaRPr>
-          </a:p>
-        </p:txBody>
-      </p:sp>
-      <p:cxnSp>
-        <p:nvCxnSpPr>
-          <p:cNvPr id="54" name="연결선: 꺾임 53">
-            <a:extLst>
-              <a:ext uri="{FF2B5EF4-FFF2-40B4-BE49-F238E27FC236}">
-                <a16:creationId xmlns:a16="http://schemas.microsoft.com/office/drawing/2014/main" id="{168872F9-2BF7-C7F4-F64F-B3B163FC9A7E}"/>
-              </a:ext>
-            </a:extLst>
-          </p:cNvPr>
-          <p:cNvCxnSpPr>
-            <a:cxnSpLocks/>
-            <a:endCxn id="53" idx="3"/>
-          </p:cNvCxnSpPr>
-          <p:nvPr/>
-        </p:nvCxnSpPr>
-        <p:spPr>
-          <a:xfrm rot="16200000" flipH="1">
-            <a:off x="343692" y="4525487"/>
-            <a:ext cx="2846331" cy="531977"/>
-          </a:xfrm>
-          <a:prstGeom prst="bentConnector2">
-            <a:avLst/>
-          </a:prstGeom>
-          <a:ln>
-            <a:tailEnd type="triangle"/>
-          </a:ln>
-        </p:spPr>
-        <p:style>
-          <a:lnRef idx="2">
-            <a:schemeClr val="accent1"/>
-          </a:lnRef>
-          <a:fillRef idx="0">
-            <a:schemeClr val="accent1"/>
-          </a:fillRef>
-          <a:effectRef idx="1">
-            <a:schemeClr val="accent1"/>
-          </a:effectRef>
-          <a:fontRef idx="minor">
-            <a:schemeClr val="tx1"/>
-          </a:fontRef>
-        </p:style>
-      </p:cxnSp>
+            </a:ln>
+          </p:spPr>
+          <p:style>
+            <a:lnRef idx="2">
+              <a:schemeClr val="accent1">
+                <a:shade val="15000"/>
+              </a:schemeClr>
+            </a:lnRef>
+            <a:fillRef idx="1">
+              <a:schemeClr val="accent1"/>
+            </a:fillRef>
+            <a:effectRef idx="0">
+              <a:schemeClr val="accent1"/>
+            </a:effectRef>
+            <a:fontRef idx="minor">
+              <a:schemeClr val="lt1"/>
+            </a:fontRef>
+          </p:style>
+          <p:txBody>
+            <a:bodyPr rtlCol="0" anchor="ctr"/>
+            <a:lstStyle/>
+            <a:p>
+              <a:pPr algn="ctr"/>
+              <a:r>
+                <a:rPr lang="en-US" altLang="ko-KR" sz="1100" dirty="0">
+                  <a:solidFill>
+                    <a:schemeClr val="tx1"/>
+                  </a:solidFill>
+                </a:rPr>
+                <a:t>config/</a:t>
+              </a:r>
+              <a:endParaRPr lang="ko-KR" altLang="en-US" sz="1100" dirty="0">
+                <a:solidFill>
+                  <a:schemeClr val="tx1"/>
+                </a:solidFill>
+              </a:endParaRPr>
+            </a:p>
+          </p:txBody>
+        </p:sp>
+        <p:cxnSp>
+          <p:nvCxnSpPr>
+            <p:cNvPr id="52" name="연결선: 꺾임 51">
+              <a:extLst>
+                <a:ext uri="{FF2B5EF4-FFF2-40B4-BE49-F238E27FC236}">
+                  <a16:creationId xmlns:a16="http://schemas.microsoft.com/office/drawing/2014/main" id="{091E5D5F-972F-4855-AA53-7CF0926E9446}"/>
+                </a:ext>
+              </a:extLst>
+            </p:cNvPr>
+            <p:cNvCxnSpPr>
+              <a:cxnSpLocks/>
+              <a:endCxn id="51" idx="3"/>
+            </p:cNvCxnSpPr>
+            <p:nvPr/>
+          </p:nvCxnSpPr>
+          <p:spPr>
+            <a:xfrm rot="16200000" flipH="1">
+              <a:off x="643324" y="3918112"/>
+              <a:ext cx="2241046" cy="537997"/>
+            </a:xfrm>
+            <a:prstGeom prst="bentConnector2">
+              <a:avLst/>
+            </a:prstGeom>
+            <a:ln>
+              <a:tailEnd type="triangle"/>
+            </a:ln>
+          </p:spPr>
+          <p:style>
+            <a:lnRef idx="2">
+              <a:schemeClr val="accent1"/>
+            </a:lnRef>
+            <a:fillRef idx="0">
+              <a:schemeClr val="accent1"/>
+            </a:fillRef>
+            <a:effectRef idx="1">
+              <a:schemeClr val="accent1"/>
+            </a:effectRef>
+            <a:fontRef idx="minor">
+              <a:schemeClr val="tx1"/>
+            </a:fontRef>
+          </p:style>
+        </p:cxnSp>
+        <p:sp>
+          <p:nvSpPr>
+            <p:cNvPr id="53" name="사각형: 둥근 모서리 52">
+              <a:extLst>
+                <a:ext uri="{FF2B5EF4-FFF2-40B4-BE49-F238E27FC236}">
+                  <a16:creationId xmlns:a16="http://schemas.microsoft.com/office/drawing/2014/main" id="{2DF0EBFD-901D-2DAE-2D77-F80DC2EF7D76}"/>
+                </a:ext>
+              </a:extLst>
+            </p:cNvPr>
+            <p:cNvSpPr/>
+            <p:nvPr/>
+          </p:nvSpPr>
+          <p:spPr>
+            <a:xfrm rot="10800000" flipV="1">
+              <a:off x="2032846" y="5912920"/>
+              <a:ext cx="1481542" cy="603443"/>
+            </a:xfrm>
+            <a:prstGeom prst="roundRect">
+              <a:avLst/>
+            </a:prstGeom>
+            <a:noFill/>
+            <a:ln w="38100">
+              <a:solidFill>
+                <a:schemeClr val="accent4">
+                  <a:lumMod val="60000"/>
+                  <a:lumOff val="40000"/>
+                </a:schemeClr>
+              </a:solidFill>
+            </a:ln>
+          </p:spPr>
+          <p:style>
+            <a:lnRef idx="2">
+              <a:schemeClr val="accent1">
+                <a:shade val="15000"/>
+              </a:schemeClr>
+            </a:lnRef>
+            <a:fillRef idx="1">
+              <a:schemeClr val="accent1"/>
+            </a:fillRef>
+            <a:effectRef idx="0">
+              <a:schemeClr val="accent1"/>
+            </a:effectRef>
+            <a:fontRef idx="minor">
+              <a:schemeClr val="lt1"/>
+            </a:fontRef>
+          </p:style>
+          <p:txBody>
+            <a:bodyPr rtlCol="0" anchor="ctr"/>
+            <a:lstStyle/>
+            <a:p>
+              <a:pPr algn="ctr"/>
+              <a:r>
+                <a:rPr lang="en-US" altLang="ko-KR" sz="1100" dirty="0">
+                  <a:solidFill>
+                    <a:schemeClr val="tx1"/>
+                  </a:solidFill>
+                </a:rPr>
+                <a:t>launch/</a:t>
+              </a:r>
+              <a:endParaRPr lang="ko-KR" altLang="en-US" sz="1100" dirty="0">
+                <a:solidFill>
+                  <a:schemeClr val="tx1"/>
+                </a:solidFill>
+              </a:endParaRPr>
+            </a:p>
+          </p:txBody>
+        </p:sp>
+        <p:cxnSp>
+          <p:nvCxnSpPr>
+            <p:cNvPr id="54" name="연결선: 꺾임 53">
+              <a:extLst>
+                <a:ext uri="{FF2B5EF4-FFF2-40B4-BE49-F238E27FC236}">
+                  <a16:creationId xmlns:a16="http://schemas.microsoft.com/office/drawing/2014/main" id="{168872F9-2BF7-C7F4-F64F-B3B163FC9A7E}"/>
+                </a:ext>
+              </a:extLst>
+            </p:cNvPr>
+            <p:cNvCxnSpPr>
+              <a:cxnSpLocks/>
+              <a:endCxn id="53" idx="3"/>
+            </p:cNvCxnSpPr>
+            <p:nvPr/>
+          </p:nvCxnSpPr>
+          <p:spPr>
+            <a:xfrm rot="16200000" flipH="1">
+              <a:off x="343692" y="4525487"/>
+              <a:ext cx="2846331" cy="531977"/>
+            </a:xfrm>
+            <a:prstGeom prst="bentConnector2">
+              <a:avLst/>
+            </a:prstGeom>
+            <a:ln>
+              <a:tailEnd type="triangle"/>
+            </a:ln>
+          </p:spPr>
+          <p:style>
+            <a:lnRef idx="2">
+              <a:schemeClr val="accent1"/>
+            </a:lnRef>
+            <a:fillRef idx="0">
+              <a:schemeClr val="accent1"/>
+            </a:fillRef>
+            <a:effectRef idx="1">
+              <a:schemeClr val="accent1"/>
+            </a:effectRef>
+            <a:fontRef idx="minor">
+              <a:schemeClr val="tx1"/>
+            </a:fontRef>
+          </p:style>
+        </p:cxnSp>
+      </p:grpSp>
       <p:sp>
         <p:nvSpPr>
           <p:cNvPr id="67" name="TextBox 66">
